--- a/Vendor_Boards/Microchip_PICDEM 2 plus_board_2010/18f/tutorials/GCBASIC_Part1.pptx
+++ b/Vendor_Boards/Microchip_PICDEM 2 plus_board_2010/18f/tutorials/GCBASIC_Part1.pptx
@@ -5,10 +5,10 @@
     <p:sldMasterId id="2147483660" r:id="rId1"/>
   </p:sldMasterIdLst>
   <p:notesMasterIdLst>
-    <p:notesMasterId r:id="rId16"/>
+    <p:notesMasterId r:id="rId18"/>
   </p:notesMasterIdLst>
   <p:handoutMasterIdLst>
-    <p:handoutMasterId r:id="rId17"/>
+    <p:handoutMasterId r:id="rId19"/>
   </p:handoutMasterIdLst>
   <p:sldIdLst>
     <p:sldId id="294" r:id="rId2"/>
@@ -20,11 +20,13 @@
     <p:sldId id="291" r:id="rId8"/>
     <p:sldId id="285" r:id="rId9"/>
     <p:sldId id="300" r:id="rId10"/>
-    <p:sldId id="298" r:id="rId11"/>
-    <p:sldId id="288" r:id="rId12"/>
-    <p:sldId id="297" r:id="rId13"/>
-    <p:sldId id="292" r:id="rId14"/>
-    <p:sldId id="299" r:id="rId15"/>
+    <p:sldId id="301" r:id="rId11"/>
+    <p:sldId id="302" r:id="rId12"/>
+    <p:sldId id="298" r:id="rId13"/>
+    <p:sldId id="288" r:id="rId14"/>
+    <p:sldId id="297" r:id="rId15"/>
+    <p:sldId id="292" r:id="rId16"/>
+    <p:sldId id="299" r:id="rId17"/>
   </p:sldIdLst>
   <p:sldSz cx="9144000" cy="5143500" type="screen16x9"/>
   <p:notesSz cx="6858000" cy="9144000"/>
@@ -209,7 +211,7 @@
             <a:fld id="{742E545A-AB39-44F0-B5A6-04A90C6C9399}" type="datetimeFigureOut">
               <a:rPr lang="en-GB" smtClean="0"/>
               <a:pPr/>
-              <a:t>04/08/2026</a:t>
+              <a:t>05/08/2026</a:t>
             </a:fld>
             <a:endParaRPr lang="en-GB"/>
           </a:p>
@@ -376,7 +378,7 @@
             <a:fld id="{FF100B3C-2E11-428B-8555-A77018253716}" type="datetimeFigureOut">
               <a:rPr lang="en-GB" smtClean="0"/>
               <a:pPr/>
-              <a:t>04/08/2026</a:t>
+              <a:t>05/08/2026</a:t>
             </a:fld>
             <a:endParaRPr lang="en-GB"/>
           </a:p>
@@ -669,7 +671,7 @@
           <p:cNvPr id="7" name="Rectangle 6">
             <a:extLst>
               <a:ext uri="{FF2B5EF4-FFF2-40B4-BE49-F238E27FC236}">
-                <a16:creationId xmlns:a16="http://schemas.microsoft.com/office/drawing/2014/main" xmlns="" id="{9C757326-0232-4CDF-81FF-302CA676961B}"/>
+                <a16:creationId xmlns="" xmlns:a16="http://schemas.microsoft.com/office/drawing/2014/main" id="{9C757326-0232-4CDF-81FF-302CA676961B}"/>
               </a:ext>
             </a:extLst>
           </p:cNvPr>
@@ -721,7 +723,7 @@
           <p:cNvPr id="8" name="Picture 7">
             <a:extLst>
               <a:ext uri="{FF2B5EF4-FFF2-40B4-BE49-F238E27FC236}">
-                <a16:creationId xmlns:a16="http://schemas.microsoft.com/office/drawing/2014/main" xmlns="" id="{4987E008-68E6-4A43-85BC-1A6ACDF91DE1}"/>
+                <a16:creationId xmlns="" xmlns:a16="http://schemas.microsoft.com/office/drawing/2014/main" id="{4987E008-68E6-4A43-85BC-1A6ACDF91DE1}"/>
               </a:ext>
             </a:extLst>
           </p:cNvPr>
@@ -750,7 +752,7 @@
           <p:cNvPr id="11" name="Picture 10">
             <a:extLst>
               <a:ext uri="{FF2B5EF4-FFF2-40B4-BE49-F238E27FC236}">
-                <a16:creationId xmlns:a16="http://schemas.microsoft.com/office/drawing/2014/main" xmlns="" id="{A1F8C892-C868-4DF6-91AB-B18CE632B10F}"/>
+                <a16:creationId xmlns="" xmlns:a16="http://schemas.microsoft.com/office/drawing/2014/main" id="{A1F8C892-C868-4DF6-91AB-B18CE632B10F}"/>
               </a:ext>
             </a:extLst>
           </p:cNvPr>
@@ -936,7 +938,7 @@
           <p:cNvPr id="12" name="Text Placeholder 2">
             <a:extLst>
               <a:ext uri="{FF2B5EF4-FFF2-40B4-BE49-F238E27FC236}">
-                <a16:creationId xmlns:a16="http://schemas.microsoft.com/office/drawing/2014/main" xmlns="" id="{D547E580-E6D6-4D97-BB04-05795A830147}"/>
+                <a16:creationId xmlns="" xmlns:a16="http://schemas.microsoft.com/office/drawing/2014/main" id="{D547E580-E6D6-4D97-BB04-05795A830147}"/>
               </a:ext>
             </a:extLst>
           </p:cNvPr>
@@ -1089,7 +1091,7 @@
           <p:cNvPr id="9" name="Picture 8">
             <a:extLst>
               <a:ext uri="{FF2B5EF4-FFF2-40B4-BE49-F238E27FC236}">
-                <a16:creationId xmlns:a16="http://schemas.microsoft.com/office/drawing/2014/main" xmlns="" id="{7CE2C968-D10A-4226-8FDC-CBC4C7EDD0B7}"/>
+                <a16:creationId xmlns="" xmlns:a16="http://schemas.microsoft.com/office/drawing/2014/main" id="{7CE2C968-D10A-4226-8FDC-CBC4C7EDD0B7}"/>
               </a:ext>
             </a:extLst>
           </p:cNvPr>
@@ -1291,7 +1293,7 @@
             <a:fld id="{C473AACB-D821-4991-9D88-46EB8D29E619}" type="datetimeFigureOut">
               <a:rPr lang="en-GB" smtClean="0"/>
               <a:pPr/>
-              <a:t>04/08/2026</a:t>
+              <a:t>05/08/2026</a:t>
             </a:fld>
             <a:endParaRPr lang="en-GB" dirty="0"/>
           </a:p>
@@ -1375,7 +1377,7 @@
           <p:cNvPr id="9" name="Picture 8">
             <a:extLst>
               <a:ext uri="{FF2B5EF4-FFF2-40B4-BE49-F238E27FC236}">
-                <a16:creationId xmlns:a16="http://schemas.microsoft.com/office/drawing/2014/main" xmlns="" id="{6AB5D66D-00C1-40EA-BFC8-305566F10369}"/>
+                <a16:creationId xmlns="" xmlns:a16="http://schemas.microsoft.com/office/drawing/2014/main" id="{6AB5D66D-00C1-40EA-BFC8-305566F10369}"/>
               </a:ext>
             </a:extLst>
           </p:cNvPr>
@@ -1585,7 +1587,7 @@
             <a:fld id="{C473AACB-D821-4991-9D88-46EB8D29E619}" type="datetimeFigureOut">
               <a:rPr lang="en-GB" smtClean="0"/>
               <a:pPr/>
-              <a:t>04/08/2026</a:t>
+              <a:t>05/08/2026</a:t>
             </a:fld>
             <a:endParaRPr lang="en-GB" dirty="0"/>
           </a:p>
@@ -1838,7 +1840,7 @@
             <a:fld id="{C473AACB-D821-4991-9D88-46EB8D29E619}" type="datetimeFigureOut">
               <a:rPr lang="en-GB" smtClean="0"/>
               <a:pPr/>
-              <a:t>04/08/2026</a:t>
+              <a:t>05/08/2026</a:t>
             </a:fld>
             <a:endParaRPr lang="en-GB" dirty="0"/>
           </a:p>
@@ -1892,7 +1894,7 @@
           <p:cNvPr id="8" name="Picture 7">
             <a:extLst>
               <a:ext uri="{FF2B5EF4-FFF2-40B4-BE49-F238E27FC236}">
-                <a16:creationId xmlns:a16="http://schemas.microsoft.com/office/drawing/2014/main" xmlns="" id="{AD4D4CB4-D965-4BB6-B218-086244C13BAE}"/>
+                <a16:creationId xmlns="" xmlns:a16="http://schemas.microsoft.com/office/drawing/2014/main" id="{AD4D4CB4-D965-4BB6-B218-086244C13BAE}"/>
               </a:ext>
             </a:extLst>
           </p:cNvPr>
@@ -2183,7 +2185,7 @@
             <a:fld id="{C473AACB-D821-4991-9D88-46EB8D29E619}" type="datetimeFigureOut">
               <a:rPr lang="en-GB" smtClean="0"/>
               <a:pPr/>
-              <a:t>04/08/2026</a:t>
+              <a:t>05/08/2026</a:t>
             </a:fld>
             <a:endParaRPr lang="en-GB" dirty="0"/>
           </a:p>
@@ -2327,7 +2329,7 @@
           <p:cNvPr id="11" name="Picture 10">
             <a:extLst>
               <a:ext uri="{FF2B5EF4-FFF2-40B4-BE49-F238E27FC236}">
-                <a16:creationId xmlns:a16="http://schemas.microsoft.com/office/drawing/2014/main" xmlns="" id="{A3B58C4E-0EF0-466C-9740-EC9F485CBD03}"/>
+                <a16:creationId xmlns="" xmlns:a16="http://schemas.microsoft.com/office/drawing/2014/main" id="{A3B58C4E-0EF0-466C-9740-EC9F485CBD03}"/>
               </a:ext>
             </a:extLst>
           </p:cNvPr>
@@ -2555,7 +2557,7 @@
             <a:fld id="{C473AACB-D821-4991-9D88-46EB8D29E619}" type="datetimeFigureOut">
               <a:rPr lang="en-GB" smtClean="0"/>
               <a:pPr/>
-              <a:t>04/08/2026</a:t>
+              <a:t>05/08/2026</a:t>
             </a:fld>
             <a:endParaRPr lang="en-GB" dirty="0"/>
           </a:p>
@@ -2609,7 +2611,7 @@
           <p:cNvPr id="7" name="Picture 6">
             <a:extLst>
               <a:ext uri="{FF2B5EF4-FFF2-40B4-BE49-F238E27FC236}">
-                <a16:creationId xmlns:a16="http://schemas.microsoft.com/office/drawing/2014/main" xmlns="" id="{2D0B9223-1250-44AA-A6C3-F2013B85AEF3}"/>
+                <a16:creationId xmlns="" xmlns:a16="http://schemas.microsoft.com/office/drawing/2014/main" id="{2D0B9223-1250-44AA-A6C3-F2013B85AEF3}"/>
               </a:ext>
             </a:extLst>
           </p:cNvPr>
@@ -2901,7 +2903,7 @@
             <a:fld id="{C473AACB-D821-4991-9D88-46EB8D29E619}" type="datetimeFigureOut">
               <a:rPr lang="en-GB" smtClean="0"/>
               <a:pPr/>
-              <a:t>04/08/2026</a:t>
+              <a:t>05/08/2026</a:t>
             </a:fld>
             <a:endParaRPr lang="en-GB" dirty="0"/>
           </a:p>
@@ -3037,7 +3039,7 @@
           <p:cNvPr id="11" name="Picture 10">
             <a:extLst>
               <a:ext uri="{FF2B5EF4-FFF2-40B4-BE49-F238E27FC236}">
-                <a16:creationId xmlns:a16="http://schemas.microsoft.com/office/drawing/2014/main" xmlns="" id="{D49E1C7C-7E53-49A2-B2C9-52307876DB7E}"/>
+                <a16:creationId xmlns="" xmlns:a16="http://schemas.microsoft.com/office/drawing/2014/main" id="{D49E1C7C-7E53-49A2-B2C9-52307876DB7E}"/>
               </a:ext>
             </a:extLst>
           </p:cNvPr>
@@ -3325,7 +3327,7 @@
             <a:fld id="{C473AACB-D821-4991-9D88-46EB8D29E619}" type="datetimeFigureOut">
               <a:rPr lang="en-GB" smtClean="0"/>
               <a:pPr/>
-              <a:t>04/08/2026</a:t>
+              <a:t>05/08/2026</a:t>
             </a:fld>
             <a:endParaRPr lang="en-GB" dirty="0"/>
           </a:p>
@@ -3379,7 +3381,7 @@
           <p:cNvPr id="9" name="Picture 8">
             <a:extLst>
               <a:ext uri="{FF2B5EF4-FFF2-40B4-BE49-F238E27FC236}">
-                <a16:creationId xmlns:a16="http://schemas.microsoft.com/office/drawing/2014/main" xmlns="" id="{23082AB0-2BB5-46FE-9A17-15E1ACC06965}"/>
+                <a16:creationId xmlns="" xmlns:a16="http://schemas.microsoft.com/office/drawing/2014/main" id="{23082AB0-2BB5-46FE-9A17-15E1ACC06965}"/>
               </a:ext>
             </a:extLst>
           </p:cNvPr>
@@ -3438,7 +3440,7 @@
           <p:cNvPr id="8" name="Picture 7">
             <a:extLst>
               <a:ext uri="{FF2B5EF4-FFF2-40B4-BE49-F238E27FC236}">
-                <a16:creationId xmlns:a16="http://schemas.microsoft.com/office/drawing/2014/main" xmlns="" id="{1862E859-E5AF-4D76-9FC9-2355B24FF141}"/>
+                <a16:creationId xmlns="" xmlns:a16="http://schemas.microsoft.com/office/drawing/2014/main" id="{1862E859-E5AF-4D76-9FC9-2355B24FF141}"/>
               </a:ext>
             </a:extLst>
           </p:cNvPr>
@@ -3560,7 +3562,7 @@
             <a:fld id="{C473AACB-D821-4991-9D88-46EB8D29E619}" type="datetimeFigureOut">
               <a:rPr lang="en-GB" smtClean="0"/>
               <a:pPr/>
-              <a:t>04/08/2026</a:t>
+              <a:t>05/08/2026</a:t>
             </a:fld>
             <a:endParaRPr lang="en-GB" dirty="0"/>
           </a:p>
@@ -3644,7 +3646,7 @@
           <p:cNvPr id="8" name="Picture 7">
             <a:extLst>
               <a:ext uri="{FF2B5EF4-FFF2-40B4-BE49-F238E27FC236}">
-                <a16:creationId xmlns:a16="http://schemas.microsoft.com/office/drawing/2014/main" xmlns="" id="{91908D0E-7544-4687-965B-72EF64AA4C54}"/>
+                <a16:creationId xmlns="" xmlns:a16="http://schemas.microsoft.com/office/drawing/2014/main" id="{91908D0E-7544-4687-965B-72EF64AA4C54}"/>
               </a:ext>
             </a:extLst>
           </p:cNvPr>
@@ -3771,7 +3773,7 @@
             <a:fld id="{C473AACB-D821-4991-9D88-46EB8D29E619}" type="datetimeFigureOut">
               <a:rPr lang="en-GB" smtClean="0"/>
               <a:pPr/>
-              <a:t>04/08/2026</a:t>
+              <a:t>05/08/2026</a:t>
             </a:fld>
             <a:endParaRPr lang="en-GB" dirty="0"/>
           </a:p>
@@ -3855,7 +3857,7 @@
           <p:cNvPr id="8" name="Picture 7">
             <a:extLst>
               <a:ext uri="{FF2B5EF4-FFF2-40B4-BE49-F238E27FC236}">
-                <a16:creationId xmlns:a16="http://schemas.microsoft.com/office/drawing/2014/main" xmlns="" id="{5B5B8CA2-02D4-408C-B548-182D4F5F54B2}"/>
+                <a16:creationId xmlns="" xmlns:a16="http://schemas.microsoft.com/office/drawing/2014/main" id="{5B5B8CA2-02D4-408C-B548-182D4F5F54B2}"/>
               </a:ext>
             </a:extLst>
           </p:cNvPr>
@@ -3989,7 +3991,7 @@
             <a:fld id="{C473AACB-D821-4991-9D88-46EB8D29E619}" type="datetimeFigureOut">
               <a:rPr lang="en-GB" smtClean="0"/>
               <a:pPr/>
-              <a:t>04/08/2026</a:t>
+              <a:t>05/08/2026</a:t>
             </a:fld>
             <a:endParaRPr lang="en-GB" dirty="0"/>
           </a:p>
@@ -4073,7 +4075,7 @@
           <p:cNvPr id="11" name="Picture 10">
             <a:extLst>
               <a:ext uri="{FF2B5EF4-FFF2-40B4-BE49-F238E27FC236}">
-                <a16:creationId xmlns:a16="http://schemas.microsoft.com/office/drawing/2014/main" xmlns="" id="{EA8DB33B-8BF9-4C99-B31C-55246227EFDE}"/>
+                <a16:creationId xmlns="" xmlns:a16="http://schemas.microsoft.com/office/drawing/2014/main" id="{EA8DB33B-8BF9-4C99-B31C-55246227EFDE}"/>
               </a:ext>
             </a:extLst>
           </p:cNvPr>
@@ -4804,7 +4806,7 @@
             <a:fld id="{C473AACB-D821-4991-9D88-46EB8D29E619}" type="datetimeFigureOut">
               <a:rPr lang="en-GB" smtClean="0"/>
               <a:pPr/>
-              <a:t>04/08/2026</a:t>
+              <a:t>05/08/2026</a:t>
             </a:fld>
             <a:endParaRPr lang="en-GB" dirty="0"/>
           </a:p>
@@ -4888,7 +4890,7 @@
           <p:cNvPr id="11" name="Picture 10">
             <a:extLst>
               <a:ext uri="{FF2B5EF4-FFF2-40B4-BE49-F238E27FC236}">
-                <a16:creationId xmlns:a16="http://schemas.microsoft.com/office/drawing/2014/main" xmlns="" id="{EA8DB33B-8BF9-4C99-B31C-55246227EFDE}"/>
+                <a16:creationId xmlns="" xmlns:a16="http://schemas.microsoft.com/office/drawing/2014/main" id="{EA8DB33B-8BF9-4C99-B31C-55246227EFDE}"/>
               </a:ext>
             </a:extLst>
           </p:cNvPr>
@@ -5618,7 +5620,7 @@
             <a:fld id="{C473AACB-D821-4991-9D88-46EB8D29E619}" type="datetimeFigureOut">
               <a:rPr lang="en-GB" smtClean="0"/>
               <a:pPr/>
-              <a:t>04/08/2026</a:t>
+              <a:t>05/08/2026</a:t>
             </a:fld>
             <a:endParaRPr lang="en-GB" dirty="0"/>
           </a:p>
@@ -5867,7 +5869,7 @@
             <a:fld id="{C473AACB-D821-4991-9D88-46EB8D29E619}" type="datetimeFigureOut">
               <a:rPr lang="en-GB" smtClean="0"/>
               <a:pPr/>
-              <a:t>04/08/2026</a:t>
+              <a:t>05/08/2026</a:t>
             </a:fld>
             <a:endParaRPr lang="en-GB" dirty="0"/>
           </a:p>
@@ -5921,7 +5923,7 @@
           <p:cNvPr id="7" name="Picture 6">
             <a:extLst>
               <a:ext uri="{FF2B5EF4-FFF2-40B4-BE49-F238E27FC236}">
-                <a16:creationId xmlns:a16="http://schemas.microsoft.com/office/drawing/2014/main" xmlns="" id="{6331EFED-43C1-4CBA-8BE3-308E3AA13B9B}"/>
+                <a16:creationId xmlns="" xmlns:a16="http://schemas.microsoft.com/office/drawing/2014/main" id="{6331EFED-43C1-4CBA-8BE3-308E3AA13B9B}"/>
               </a:ext>
             </a:extLst>
           </p:cNvPr>
@@ -6131,7 +6133,7 @@
             <a:fld id="{C473AACB-D821-4991-9D88-46EB8D29E619}" type="datetimeFigureOut">
               <a:rPr lang="en-GB" smtClean="0"/>
               <a:pPr/>
-              <a:t>04/08/2026</a:t>
+              <a:t>05/08/2026</a:t>
             </a:fld>
             <a:endParaRPr lang="en-GB" dirty="0"/>
           </a:p>
@@ -6185,7 +6187,7 @@
           <p:cNvPr id="9" name="Picture 8">
             <a:extLst>
               <a:ext uri="{FF2B5EF4-FFF2-40B4-BE49-F238E27FC236}">
-                <a16:creationId xmlns:a16="http://schemas.microsoft.com/office/drawing/2014/main" xmlns="" id="{1034EA63-4BE3-4A73-A7E6-4A75BE4C1D48}"/>
+                <a16:creationId xmlns="" xmlns:a16="http://schemas.microsoft.com/office/drawing/2014/main" id="{1034EA63-4BE3-4A73-A7E6-4A75BE4C1D48}"/>
               </a:ext>
             </a:extLst>
           </p:cNvPr>
@@ -6244,7 +6246,7 @@
           <p:cNvPr id="10" name="Picture 9">
             <a:extLst>
               <a:ext uri="{FF2B5EF4-FFF2-40B4-BE49-F238E27FC236}">
-                <a16:creationId xmlns:a16="http://schemas.microsoft.com/office/drawing/2014/main" xmlns="" id="{204DC1E6-B5F4-4160-90F3-351FB3242E92}"/>
+                <a16:creationId xmlns="" xmlns:a16="http://schemas.microsoft.com/office/drawing/2014/main" id="{204DC1E6-B5F4-4160-90F3-351FB3242E92}"/>
               </a:ext>
             </a:extLst>
           </p:cNvPr>
@@ -6571,7 +6573,7 @@
             <a:fld id="{C473AACB-D821-4991-9D88-46EB8D29E619}" type="datetimeFigureOut">
               <a:rPr lang="en-GB" smtClean="0"/>
               <a:pPr/>
-              <a:t>04/08/2026</a:t>
+              <a:t>05/08/2026</a:t>
             </a:fld>
             <a:endParaRPr lang="en-GB" dirty="0"/>
           </a:p>
@@ -6655,7 +6657,7 @@
           <p:cNvPr id="6" name="Picture 5">
             <a:extLst>
               <a:ext uri="{FF2B5EF4-FFF2-40B4-BE49-F238E27FC236}">
-                <a16:creationId xmlns:a16="http://schemas.microsoft.com/office/drawing/2014/main" xmlns="" id="{E7897C67-3827-4595-8E3A-71E9F2EAB3AF}"/>
+                <a16:creationId xmlns="" xmlns:a16="http://schemas.microsoft.com/office/drawing/2014/main" id="{E7897C67-3827-4595-8E3A-71E9F2EAB3AF}"/>
               </a:ext>
             </a:extLst>
           </p:cNvPr>
@@ -6726,7 +6728,7 @@
             <a:fld id="{C473AACB-D821-4991-9D88-46EB8D29E619}" type="datetimeFigureOut">
               <a:rPr lang="en-GB" smtClean="0"/>
               <a:pPr/>
-              <a:t>04/08/2026</a:t>
+              <a:t>05/08/2026</a:t>
             </a:fld>
             <a:endParaRPr lang="en-GB" dirty="0"/>
           </a:p>
@@ -6823,7 +6825,7 @@
             <a:fld id="{C473AACB-D821-4991-9D88-46EB8D29E619}" type="datetimeFigureOut">
               <a:rPr lang="en-GB" smtClean="0"/>
               <a:pPr/>
-              <a:t>04/08/2026</a:t>
+              <a:t>05/08/2026</a:t>
             </a:fld>
             <a:endParaRPr lang="en-GB" dirty="0"/>
           </a:p>
@@ -6877,7 +6879,7 @@
           <p:cNvPr id="6" name="Picture 5">
             <a:extLst>
               <a:ext uri="{FF2B5EF4-FFF2-40B4-BE49-F238E27FC236}">
-                <a16:creationId xmlns:a16="http://schemas.microsoft.com/office/drawing/2014/main" xmlns="" id="{F1825398-026A-4668-BB48-C16AD1C9062B}"/>
+                <a16:creationId xmlns="" xmlns:a16="http://schemas.microsoft.com/office/drawing/2014/main" id="{F1825398-026A-4668-BB48-C16AD1C9062B}"/>
               </a:ext>
             </a:extLst>
           </p:cNvPr>
@@ -7600,7 +7602,7 @@
             <a:fld id="{C473AACB-D821-4991-9D88-46EB8D29E619}" type="datetimeFigureOut">
               <a:rPr lang="en-GB" smtClean="0"/>
               <a:pPr/>
-              <a:t>04/08/2026</a:t>
+              <a:t>05/08/2026</a:t>
             </a:fld>
             <a:endParaRPr lang="en-GB" dirty="0"/>
           </a:p>
@@ -8169,7 +8171,11 @@
           <a:p>
             <a:r>
               <a:rPr lang="en-GB" dirty="0" smtClean="0"/>
-              <a:t>PIC18Fxx 35chip Family</a:t>
+              <a:t>PIC18FxxQ35chip </a:t>
+            </a:r>
+            <a:r>
+              <a:rPr lang="en-GB" dirty="0" smtClean="0"/>
+              <a:t>Family</a:t>
             </a:r>
           </a:p>
           <a:p>
@@ -8220,130 +8226,170 @@
       </p:grpSpPr>
       <p:sp>
         <p:nvSpPr>
-          <p:cNvPr id="2" name="Title 1"/>
-          <p:cNvSpPr>
-            <a:spLocks noGrp="1"/>
-          </p:cNvSpPr>
-          <p:nvPr>
-            <p:ph type="title"/>
-          </p:nvPr>
-        </p:nvSpPr>
-        <p:spPr/>
-        <p:txBody>
-          <a:bodyPr/>
-          <a:lstStyle/>
-          <a:p>
-            <a:pPr algn="l"/>
-            <a:r>
-              <a:rPr lang="en-GB" dirty="0" smtClean="0"/>
-              <a:t>Workshop</a:t>
-            </a:r>
-            <a:endParaRPr lang="en-GB" dirty="0"/>
-          </a:p>
-        </p:txBody>
-      </p:sp>
-      <p:sp>
-        <p:nvSpPr>
-          <p:cNvPr id="3" name="Content Placeholder 2"/>
-          <p:cNvSpPr>
-            <a:spLocks noGrp="1"/>
-          </p:cNvSpPr>
-          <p:nvPr>
-            <p:ph idx="1"/>
-          </p:nvPr>
-        </p:nvSpPr>
-        <p:spPr/>
-        <p:txBody>
-          <a:bodyPr>
-            <a:normAutofit fontScale="92500"/>
+          <p:cNvPr id="4" name="Rectangle 3"/>
+          <p:cNvSpPr/>
+          <p:nvPr/>
+        </p:nvSpPr>
+        <p:spPr>
+          <a:xfrm>
+            <a:off x="0" y="103003"/>
+            <a:ext cx="9144000" cy="884571"/>
+          </a:xfrm>
+          <a:prstGeom prst="rect">
+            <a:avLst/>
+          </a:prstGeom>
+          <a:solidFill>
+            <a:schemeClr val="bg1"/>
+          </a:solidFill>
+        </p:spPr>
+        <p:txBody>
+          <a:bodyPr vert="horz" lIns="68580" tIns="34290" rIns="68580" bIns="34290" rtlCol="0" anchor="t">
+            <a:normAutofit lnSpcReduction="10000"/>
           </a:bodyPr>
           <a:lstStyle/>
           <a:p>
-            <a:r>
-              <a:rPr lang="en-GB" sz="1000" dirty="0"/>
-              <a:t>C:\</a:t>
-            </a:r>
-            <a:r>
-              <a:rPr lang="en-GB" sz="1000" dirty="0" smtClean="0"/>
-              <a:t>GCSTUDIO\GCBASIC\DEMOS\Vendor_Boards\Great_Cow_Basic_Demo_Board\18FxxQ35_Chiprange_Demonstrations</a:t>
-            </a:r>
-            <a:endParaRPr lang="en-GB" sz="1000" dirty="0"/>
-          </a:p>
-          <a:p>
-            <a:endParaRPr lang="en-GB" dirty="0" smtClean="0"/>
-          </a:p>
-          <a:p>
-            <a:r>
-              <a:rPr lang="en-GB" dirty="0" smtClean="0"/>
-              <a:t>Blink the LED</a:t>
-            </a:r>
-          </a:p>
-          <a:p>
-            <a:pPr lvl="1"/>
-            <a:r>
-              <a:rPr lang="en-GB" dirty="0" smtClean="0"/>
-              <a:t>Direct addressing of register</a:t>
-            </a:r>
-          </a:p>
-          <a:p>
-            <a:r>
-              <a:rPr lang="en-GB" dirty="0" smtClean="0"/>
-              <a:t>Blink the LED</a:t>
-            </a:r>
-          </a:p>
-          <a:p>
-            <a:pPr lvl="1"/>
-            <a:r>
-              <a:rPr lang="en-GB" dirty="0" smtClean="0"/>
-              <a:t>Introduce CONSTANTS</a:t>
-            </a:r>
-          </a:p>
-          <a:p>
-            <a:pPr lvl="2"/>
-            <a:r>
-              <a:rPr lang="en-GB" dirty="0" smtClean="0"/>
-              <a:t>#DEFINE</a:t>
-            </a:r>
-          </a:p>
-          <a:p>
-            <a:pPr lvl="1"/>
-            <a:r>
-              <a:rPr lang="en-GB" dirty="0" smtClean="0"/>
-              <a:t>GCBASIC commands</a:t>
-            </a:r>
-          </a:p>
-          <a:p>
-            <a:pPr lvl="2"/>
-            <a:r>
-              <a:rPr lang="en-GB" dirty="0" smtClean="0"/>
-              <a:t>DIR</a:t>
-            </a:r>
-          </a:p>
-          <a:p>
-            <a:pPr lvl="2"/>
-            <a:r>
-              <a:rPr lang="en-GB" dirty="0" smtClean="0"/>
-              <a:t>WAIT</a:t>
-            </a:r>
-          </a:p>
-          <a:p>
-            <a:pPr lvl="2"/>
-            <a:endParaRPr lang="en-GB" dirty="0" smtClean="0"/>
-          </a:p>
-          <a:p>
-            <a:pPr lvl="2"/>
-            <a:endParaRPr lang="en-GB" dirty="0" smtClean="0"/>
-          </a:p>
-          <a:p>
-            <a:pPr lvl="1"/>
-            <a:endParaRPr lang="en-GB" dirty="0" smtClean="0"/>
+            <a:pPr defTabSz="342900">
+              <a:spcBef>
+                <a:spcPct val="0"/>
+              </a:spcBef>
+            </a:pPr>
+            <a:r>
+              <a:rPr lang="en-GB" sz="2700" dirty="0">
+                <a:solidFill>
+                  <a:schemeClr val="accent1"/>
+                </a:solidFill>
+                <a:latin typeface="+mj-lt"/>
+                <a:ea typeface="+mj-ea"/>
+                <a:cs typeface="+mj-cs"/>
+              </a:rPr>
+              <a:t>PICDEM 2 Plus </a:t>
+            </a:r>
+            <a:r>
+              <a:rPr lang="en-GB" sz="2700" dirty="0" smtClean="0">
+                <a:solidFill>
+                  <a:schemeClr val="accent1"/>
+                </a:solidFill>
+                <a:latin typeface="+mj-lt"/>
+                <a:ea typeface="+mj-ea"/>
+                <a:cs typeface="+mj-cs"/>
+              </a:rPr>
+              <a:t>Demonstration</a:t>
+            </a:r>
+          </a:p>
+          <a:p>
+            <a:pPr defTabSz="342900">
+              <a:spcBef>
+                <a:spcPct val="0"/>
+              </a:spcBef>
+            </a:pPr>
+            <a:r>
+              <a:rPr lang="en-GB" sz="2700" dirty="0" smtClean="0">
+                <a:solidFill>
+                  <a:schemeClr val="accent1"/>
+                </a:solidFill>
+                <a:latin typeface="+mj-lt"/>
+                <a:ea typeface="+mj-ea"/>
+                <a:cs typeface="+mj-cs"/>
+              </a:rPr>
+              <a:t>Board </a:t>
+            </a:r>
+            <a:endParaRPr lang="en-GB" sz="2700" dirty="0">
+              <a:solidFill>
+                <a:schemeClr val="accent1"/>
+              </a:solidFill>
+              <a:latin typeface="+mj-lt"/>
+              <a:ea typeface="+mj-ea"/>
+              <a:cs typeface="+mj-cs"/>
+            </a:endParaRPr>
+          </a:p>
+        </p:txBody>
+      </p:sp>
+      <p:pic>
+        <p:nvPicPr>
+          <p:cNvPr id="3075" name="Picture 3"/>
+          <p:cNvPicPr>
+            <a:picLocks noChangeAspect="1" noChangeArrowheads="1"/>
+          </p:cNvPicPr>
+          <p:nvPr/>
+        </p:nvPicPr>
+        <p:blipFill>
+          <a:blip r:embed="rId2">
+            <a:extLst>
+              <a:ext uri="{28A0092B-C50C-407E-A947-70E740481C1C}">
+                <a14:useLocalDpi xmlns:a14="http://schemas.microsoft.com/office/drawing/2010/main" val="0"/>
+              </a:ext>
+            </a:extLst>
+          </a:blip>
+          <a:srcRect/>
+          <a:stretch>
+            <a:fillRect/>
+          </a:stretch>
+        </p:blipFill>
+        <p:spPr bwMode="auto">
+          <a:xfrm>
+            <a:off x="1043608" y="853187"/>
+            <a:ext cx="6480719" cy="4392687"/>
+          </a:xfrm>
+          <a:prstGeom prst="rect">
+            <a:avLst/>
+          </a:prstGeom>
+          <a:noFill/>
+          <a:ln>
+            <a:noFill/>
+          </a:ln>
+          <a:effectLst/>
+        </p:spPr>
+      </p:pic>
+      <p:sp>
+        <p:nvSpPr>
+          <p:cNvPr id="5" name="Rectangle 4"/>
+          <p:cNvSpPr/>
+          <p:nvPr/>
+        </p:nvSpPr>
+        <p:spPr>
+          <a:xfrm>
+            <a:off x="6382635" y="1321402"/>
+            <a:ext cx="1152128" cy="797569"/>
+          </a:xfrm>
+          <a:prstGeom prst="rect">
+            <a:avLst/>
+          </a:prstGeom>
+          <a:noFill/>
+          <a:ln>
+            <a:solidFill>
+              <a:srgbClr val="FF0000"/>
+            </a:solidFill>
+          </a:ln>
+        </p:spPr>
+        <p:style>
+          <a:lnRef idx="2">
+            <a:schemeClr val="accent1">
+              <a:shade val="50000"/>
+            </a:schemeClr>
+          </a:lnRef>
+          <a:fillRef idx="1">
+            <a:schemeClr val="accent1"/>
+          </a:fillRef>
+          <a:effectRef idx="0">
+            <a:schemeClr val="accent1"/>
+          </a:effectRef>
+          <a:fontRef idx="minor">
+            <a:schemeClr val="lt1"/>
+          </a:fontRef>
+        </p:style>
+        <p:txBody>
+          <a:bodyPr rtlCol="0" anchor="ctr"/>
+          <a:lstStyle/>
+          <a:p>
+            <a:pPr algn="ctr"/>
+            <a:endParaRPr lang="en-GB"/>
           </a:p>
         </p:txBody>
       </p:sp>
     </p:spTree>
     <p:extLst>
       <p:ext uri="{BB962C8B-B14F-4D97-AF65-F5344CB8AC3E}">
-        <p14:creationId xmlns:p14="http://schemas.microsoft.com/office/powerpoint/2010/main" val="2851363068"/>
+        <p14:creationId xmlns:p14="http://schemas.microsoft.com/office/powerpoint/2010/main" val="2437074414"/>
       </p:ext>
     </p:extLst>
   </p:cSld>
@@ -8387,43 +8433,280 @@
       </p:grpSpPr>
       <p:sp>
         <p:nvSpPr>
-          <p:cNvPr id="2" name="Title 1"/>
-          <p:cNvSpPr>
-            <a:spLocks noGrp="1"/>
-          </p:cNvSpPr>
-          <p:nvPr>
-            <p:ph type="title"/>
-          </p:nvPr>
-        </p:nvSpPr>
-        <p:spPr/>
-        <p:txBody>
-          <a:bodyPr/>
+          <p:cNvPr id="4" name="Rectangle 3"/>
+          <p:cNvSpPr/>
+          <p:nvPr/>
+        </p:nvSpPr>
+        <p:spPr>
+          <a:xfrm>
+            <a:off x="0" y="103003"/>
+            <a:ext cx="9143999" cy="884571"/>
+          </a:xfrm>
+          <a:prstGeom prst="rect">
+            <a:avLst/>
+          </a:prstGeom>
+          <a:solidFill>
+            <a:schemeClr val="bg1"/>
+          </a:solidFill>
+        </p:spPr>
+        <p:txBody>
+          <a:bodyPr vert="horz" lIns="68580" tIns="34290" rIns="68580" bIns="34290" rtlCol="0" anchor="t">
+            <a:normAutofit lnSpcReduction="10000"/>
+          </a:bodyPr>
           <a:lstStyle/>
           <a:p>
-            <a:endParaRPr lang="en-GB"/>
-          </a:p>
-        </p:txBody>
-      </p:sp>
-      <p:sp>
-        <p:nvSpPr>
-          <p:cNvPr id="3" name="Content Placeholder 2"/>
-          <p:cNvSpPr>
-            <a:spLocks noGrp="1"/>
-          </p:cNvSpPr>
-          <p:nvPr>
-            <p:ph idx="1"/>
-          </p:nvPr>
-        </p:nvSpPr>
-        <p:spPr/>
-        <p:txBody>
-          <a:bodyPr/>
+            <a:pPr defTabSz="342900">
+              <a:spcBef>
+                <a:spcPct val="0"/>
+              </a:spcBef>
+            </a:pPr>
+            <a:r>
+              <a:rPr lang="en-GB" sz="2700" dirty="0">
+                <a:solidFill>
+                  <a:schemeClr val="accent1"/>
+                </a:solidFill>
+                <a:latin typeface="+mj-lt"/>
+                <a:ea typeface="+mj-ea"/>
+                <a:cs typeface="+mj-cs"/>
+              </a:rPr>
+              <a:t>PICDEM 2 Plus </a:t>
+            </a:r>
+            <a:r>
+              <a:rPr lang="en-GB" sz="2700" dirty="0" smtClean="0">
+                <a:solidFill>
+                  <a:schemeClr val="accent1"/>
+                </a:solidFill>
+                <a:latin typeface="+mj-lt"/>
+                <a:ea typeface="+mj-ea"/>
+                <a:cs typeface="+mj-cs"/>
+              </a:rPr>
+              <a:t>Demonstration</a:t>
+            </a:r>
+          </a:p>
+          <a:p>
+            <a:pPr defTabSz="342900">
+              <a:spcBef>
+                <a:spcPct val="0"/>
+              </a:spcBef>
+            </a:pPr>
+            <a:r>
+              <a:rPr lang="en-GB" sz="2700" dirty="0" smtClean="0">
+                <a:solidFill>
+                  <a:schemeClr val="accent1"/>
+                </a:solidFill>
+                <a:latin typeface="+mj-lt"/>
+                <a:ea typeface="+mj-ea"/>
+                <a:cs typeface="+mj-cs"/>
+              </a:rPr>
+              <a:t>Board </a:t>
+            </a:r>
+            <a:endParaRPr lang="en-GB" sz="2700" dirty="0">
+              <a:solidFill>
+                <a:schemeClr val="accent1"/>
+              </a:solidFill>
+              <a:latin typeface="+mj-lt"/>
+              <a:ea typeface="+mj-ea"/>
+              <a:cs typeface="+mj-cs"/>
+            </a:endParaRPr>
+          </a:p>
+        </p:txBody>
+      </p:sp>
+      <p:pic>
+        <p:nvPicPr>
+          <p:cNvPr id="4098" name="Picture 2"/>
+          <p:cNvPicPr>
+            <a:picLocks noChangeAspect="1" noChangeArrowheads="1"/>
+          </p:cNvPicPr>
+          <p:nvPr/>
+        </p:nvPicPr>
+        <p:blipFill>
+          <a:blip r:embed="rId2">
+            <a:extLst>
+              <a:ext uri="{28A0092B-C50C-407E-A947-70E740481C1C}">
+                <a14:useLocalDpi xmlns:a14="http://schemas.microsoft.com/office/drawing/2010/main" val="0"/>
+              </a:ext>
+            </a:extLst>
+          </a:blip>
+          <a:srcRect/>
+          <a:stretch>
+            <a:fillRect/>
+          </a:stretch>
+        </p:blipFill>
+        <p:spPr bwMode="auto">
+          <a:xfrm>
+            <a:off x="4355976" y="1033079"/>
+            <a:ext cx="4210050" cy="3581400"/>
+          </a:xfrm>
+          <a:prstGeom prst="rect">
+            <a:avLst/>
+          </a:prstGeom>
+          <a:noFill/>
+          <a:ln>
+            <a:noFill/>
+          </a:ln>
+          <a:effectLst/>
+          <a:extLst>
+            <a:ext uri="{909E8E84-426E-40DD-AFC4-6F175D3DCCD1}">
+              <a14:hiddenFill xmlns:a14="http://schemas.microsoft.com/office/drawing/2010/main">
+                <a:solidFill>
+                  <a:schemeClr val="accent1"/>
+                </a:solidFill>
+              </a14:hiddenFill>
+            </a:ext>
+            <a:ext uri="{91240B29-F687-4F45-9708-019B960494DF}">
+              <a14:hiddenLine xmlns:a14="http://schemas.microsoft.com/office/drawing/2010/main" w="9525">
+                <a:solidFill>
+                  <a:schemeClr val="tx1"/>
+                </a:solidFill>
+                <a:miter lim="800000"/>
+                <a:headEnd/>
+                <a:tailEnd/>
+              </a14:hiddenLine>
+            </a:ext>
+            <a:ext uri="{AF507438-7753-43E0-B8FC-AC1667EBCBE1}">
+              <a14:hiddenEffects xmlns:a14="http://schemas.microsoft.com/office/drawing/2010/main">
+                <a:effectLst>
+                  <a:outerShdw dist="35921" dir="2700000" algn="ctr" rotWithShape="0">
+                    <a:schemeClr val="bg2"/>
+                  </a:outerShdw>
+                </a:effectLst>
+              </a14:hiddenEffects>
+            </a:ext>
+          </a:extLst>
+        </p:spPr>
+      </p:pic>
+      <p:pic>
+        <p:nvPicPr>
+          <p:cNvPr id="4099" name="Picture 3"/>
+          <p:cNvPicPr>
+            <a:picLocks noChangeAspect="1" noChangeArrowheads="1"/>
+          </p:cNvPicPr>
+          <p:nvPr/>
+        </p:nvPicPr>
+        <p:blipFill>
+          <a:blip r:embed="rId3">
+            <a:extLst>
+              <a:ext uri="{28A0092B-C50C-407E-A947-70E740481C1C}">
+                <a14:useLocalDpi xmlns:a14="http://schemas.microsoft.com/office/drawing/2010/main" val="0"/>
+              </a:ext>
+            </a:extLst>
+          </a:blip>
+          <a:srcRect/>
+          <a:stretch>
+            <a:fillRect/>
+          </a:stretch>
+        </p:blipFill>
+        <p:spPr bwMode="auto">
+          <a:xfrm>
+            <a:off x="1115616" y="699543"/>
+            <a:ext cx="2949645" cy="4248472"/>
+          </a:xfrm>
+          <a:prstGeom prst="rect">
+            <a:avLst/>
+          </a:prstGeom>
+          <a:noFill/>
+          <a:ln w="9525">
+            <a:solidFill>
+              <a:schemeClr val="tx1"/>
+            </a:solidFill>
+            <a:miter lim="800000"/>
+            <a:headEnd/>
+            <a:tailEnd/>
+          </a:ln>
+          <a:effectLst/>
+          <a:extLst>
+            <a:ext uri="{909E8E84-426E-40DD-AFC4-6F175D3DCCD1}">
+              <a14:hiddenFill xmlns:a14="http://schemas.microsoft.com/office/drawing/2010/main">
+                <a:solidFill>
+                  <a:schemeClr val="accent1"/>
+                </a:solidFill>
+              </a14:hiddenFill>
+            </a:ext>
+            <a:ext uri="{AF507438-7753-43E0-B8FC-AC1667EBCBE1}">
+              <a14:hiddenEffects xmlns:a14="http://schemas.microsoft.com/office/drawing/2010/main">
+                <a:effectLst>
+                  <a:outerShdw dist="35921" dir="2700000" algn="ctr" rotWithShape="0">
+                    <a:schemeClr val="bg2"/>
+                  </a:outerShdw>
+                </a:effectLst>
+              </a14:hiddenEffects>
+            </a:ext>
+          </a:extLst>
+        </p:spPr>
+      </p:pic>
+      <p:sp>
+        <p:nvSpPr>
+          <p:cNvPr id="2" name="TextBox 1"/>
+          <p:cNvSpPr txBox="1"/>
+          <p:nvPr/>
+        </p:nvSpPr>
+        <p:spPr>
+          <a:xfrm>
+            <a:off x="3489390" y="2965624"/>
+            <a:ext cx="310983" cy="107722"/>
+          </a:xfrm>
+          <a:prstGeom prst="rect">
+            <a:avLst/>
+          </a:prstGeom>
+          <a:solidFill>
+            <a:schemeClr val="bg1"/>
+          </a:solidFill>
+          <a:ln>
+            <a:solidFill>
+              <a:srgbClr val="FF0000"/>
+            </a:solidFill>
+          </a:ln>
+        </p:spPr>
+        <p:txBody>
+          <a:bodyPr wrap="none" lIns="0" tIns="0" rIns="0" bIns="0" rtlCol="0">
+            <a:spAutoFit/>
+          </a:bodyPr>
           <a:lstStyle/>
           <a:p>
-            <a:endParaRPr lang="en-GB"/>
-          </a:p>
-        </p:txBody>
-      </p:sp>
+            <a:r>
+              <a:rPr lang="en-GB" sz="700" dirty="0" smtClean="0"/>
+              <a:t>VDDIO2</a:t>
+            </a:r>
+            <a:endParaRPr lang="en-GB" sz="700" dirty="0"/>
+          </a:p>
+        </p:txBody>
+      </p:sp>
+      <p:cxnSp>
+        <p:nvCxnSpPr>
+          <p:cNvPr id="5" name="Straight Connector 4"/>
+          <p:cNvCxnSpPr/>
+          <p:nvPr/>
+        </p:nvCxnSpPr>
+        <p:spPr>
+          <a:xfrm>
+            <a:off x="5652120" y="3939902"/>
+            <a:ext cx="144016" cy="0"/>
+          </a:xfrm>
+          <a:prstGeom prst="line">
+            <a:avLst/>
+          </a:prstGeom>
+        </p:spPr>
+        <p:style>
+          <a:lnRef idx="1">
+            <a:schemeClr val="accent1"/>
+          </a:lnRef>
+          <a:fillRef idx="0">
+            <a:schemeClr val="accent1"/>
+          </a:fillRef>
+          <a:effectRef idx="0">
+            <a:schemeClr val="accent1"/>
+          </a:effectRef>
+          <a:fontRef idx="minor">
+            <a:schemeClr val="tx1"/>
+          </a:fontRef>
+        </p:style>
+      </p:cxnSp>
     </p:spTree>
+    <p:extLst>
+      <p:ext uri="{BB962C8B-B14F-4D97-AF65-F5344CB8AC3E}">
+        <p14:creationId xmlns:p14="http://schemas.microsoft.com/office/powerpoint/2010/main" val="3567642567"/>
+      </p:ext>
+    </p:extLst>
   </p:cSld>
   <p:clrMapOvr>
     <a:masterClrMapping/>
@@ -8475,408 +8758,152 @@
         </p:nvSpPr>
         <p:spPr/>
         <p:txBody>
+          <a:bodyPr/>
+          <a:lstStyle/>
+          <a:p>
+            <a:pPr algn="l"/>
+            <a:r>
+              <a:rPr lang="en-GB" dirty="0" smtClean="0"/>
+              <a:t>Workshop</a:t>
+            </a:r>
+            <a:endParaRPr lang="en-GB" dirty="0"/>
+          </a:p>
+        </p:txBody>
+      </p:sp>
+      <p:sp>
+        <p:nvSpPr>
+          <p:cNvPr id="3" name="Content Placeholder 2"/>
+          <p:cNvSpPr>
+            <a:spLocks noGrp="1"/>
+          </p:cNvSpPr>
+          <p:nvPr>
+            <p:ph idx="1"/>
+          </p:nvPr>
+        </p:nvSpPr>
+        <p:spPr/>
+        <p:txBody>
           <a:bodyPr>
-            <a:normAutofit/>
+            <a:normAutofit fontScale="92500" lnSpcReduction="20000"/>
           </a:bodyPr>
           <a:lstStyle/>
           <a:p>
+            <a:pPr marL="0" indent="0">
+              <a:buNone/>
+            </a:pPr>
+            <a:r>
+              <a:rPr lang="en-GB" sz="1300" b="1" dirty="0" smtClean="0"/>
+              <a:t>..\Demos\</a:t>
+            </a:r>
+            <a:r>
+              <a:rPr lang="en-GB" sz="1300" b="1" dirty="0" err="1" smtClean="0"/>
+              <a:t>Vendor_Boards</a:t>
+            </a:r>
+            <a:r>
+              <a:rPr lang="en-GB" sz="1300" b="1" dirty="0" smtClean="0"/>
+              <a:t>\</a:t>
+            </a:r>
+            <a:r>
+              <a:rPr lang="en-GB" sz="1300" b="1" dirty="0" err="1" smtClean="0"/>
+              <a:t>Microchip_PICDEM</a:t>
+            </a:r>
+            <a:r>
+              <a:rPr lang="en-GB" sz="1300" b="1" dirty="0" smtClean="0"/>
+              <a:t> </a:t>
+            </a:r>
+            <a:r>
+              <a:rPr lang="en-GB" sz="1300" b="1" dirty="0"/>
+              <a:t>2 </a:t>
+            </a:r>
+            <a:r>
+              <a:rPr lang="en-GB" sz="1300" b="1" dirty="0" smtClean="0"/>
+              <a:t>plus_board_2010\18f</a:t>
+            </a:r>
+          </a:p>
+          <a:p>
+            <a:endParaRPr lang="en-GB" dirty="0" smtClean="0"/>
+          </a:p>
+          <a:p>
             <a:r>
               <a:rPr lang="en-GB" dirty="0" smtClean="0"/>
-              <a:t>Videos...</a:t>
-            </a:r>
-            <a:endParaRPr lang="en-GB" dirty="0"/>
-          </a:p>
-        </p:txBody>
-      </p:sp>
-      <p:sp>
-        <p:nvSpPr>
-          <p:cNvPr id="3" name="Content Placeholder 2"/>
-          <p:cNvSpPr>
-            <a:spLocks noGrp="1"/>
-          </p:cNvSpPr>
-          <p:nvPr>
-            <p:ph idx="1"/>
-          </p:nvPr>
-        </p:nvSpPr>
-        <p:spPr>
-          <a:xfrm>
-            <a:off x="467544" y="987574"/>
-            <a:ext cx="6447501" cy="4111476"/>
-          </a:xfrm>
-          <a:solidFill>
-            <a:schemeClr val="bg1"/>
-          </a:solidFill>
-        </p:spPr>
-        <p:txBody>
-          <a:bodyPr>
-            <a:noAutofit/>
-          </a:bodyPr>
-          <a:lstStyle/>
-          <a:p>
-            <a:pPr marL="180000" indent="-478483">
-              <a:spcBef>
-                <a:spcPts val="300"/>
-              </a:spcBef>
-              <a:buFont typeface="+mj-lt"/>
-              <a:buAutoNum type="arabicPeriod"/>
-            </a:pPr>
-            <a:r>
-              <a:rPr lang="en-GB" sz="1100" dirty="0"/>
-              <a:t>Install the hardware and make the board work – three LED programs</a:t>
-            </a:r>
-          </a:p>
-          <a:p>
-            <a:pPr marL="180000" indent="-478483">
-              <a:spcBef>
-                <a:spcPts val="300"/>
-              </a:spcBef>
-              <a:buFont typeface="+mj-lt"/>
-              <a:buAutoNum type="arabicPeriod"/>
-            </a:pPr>
-            <a:r>
-              <a:rPr lang="en-GB" sz="1100" b="1" dirty="0"/>
-              <a:t>Make  four LEDs flash in a sequence</a:t>
-            </a:r>
-          </a:p>
-          <a:p>
-            <a:pPr marL="180000" indent="-478483">
-              <a:spcBef>
-                <a:spcPts val="300"/>
-              </a:spcBef>
-              <a:buFont typeface="+mj-lt"/>
-              <a:buAutoNum type="arabicPeriod"/>
-            </a:pPr>
-            <a:r>
-              <a:rPr lang="en-GB" sz="1100" dirty="0"/>
-              <a:t>Set the LEDs to represent the value of ADC</a:t>
-            </a:r>
-          </a:p>
-          <a:p>
-            <a:pPr marL="180000" indent="-478483">
-              <a:spcBef>
-                <a:spcPts val="300"/>
-              </a:spcBef>
-              <a:buFont typeface="+mj-lt"/>
-              <a:buAutoNum type="arabicPeriod"/>
-            </a:pPr>
-            <a:r>
-              <a:rPr lang="en-GB" sz="1100" dirty="0"/>
-              <a:t>Sequence the LEDs with a delay using the value of ADC</a:t>
-            </a:r>
-          </a:p>
-          <a:p>
-            <a:pPr marL="180000" indent="-478483">
-              <a:spcBef>
-                <a:spcPts val="300"/>
-              </a:spcBef>
-              <a:buFont typeface="+mj-lt"/>
-              <a:buAutoNum type="arabicPeriod"/>
-            </a:pPr>
-            <a:r>
-              <a:rPr lang="en-GB" sz="1100" dirty="0"/>
-              <a:t>Using an input to set the state of the LEDs</a:t>
-            </a:r>
-          </a:p>
-          <a:p>
-            <a:pPr marL="180000" indent="-478483">
-              <a:spcBef>
-                <a:spcPts val="300"/>
-              </a:spcBef>
-              <a:buFont typeface="+mj-lt"/>
-              <a:buAutoNum type="arabicPeriod"/>
-            </a:pPr>
-            <a:r>
-              <a:rPr lang="en-GB" sz="1100" dirty="0"/>
-              <a:t>Using the reset switch</a:t>
-            </a:r>
-          </a:p>
-          <a:p>
-            <a:pPr marL="180000" indent="-478483">
-              <a:spcBef>
-                <a:spcPts val="300"/>
-              </a:spcBef>
-              <a:buFont typeface="+mj-lt"/>
-              <a:buAutoNum type="arabicPeriod"/>
-            </a:pPr>
-            <a:r>
-              <a:rPr lang="en-GB" sz="1100" dirty="0"/>
-              <a:t>Using the switch, ADC – make the LEDs flash in a sequence with reverse</a:t>
-            </a:r>
-          </a:p>
-          <a:p>
-            <a:pPr marL="180000" indent="-478483">
-              <a:spcBef>
-                <a:spcPts val="300"/>
-              </a:spcBef>
-              <a:buFont typeface="+mj-lt"/>
-              <a:buAutoNum type="arabicPeriod"/>
-            </a:pPr>
-            <a:r>
-              <a:rPr lang="en-GB" sz="1100" dirty="0"/>
-              <a:t>Using the serial to display values</a:t>
-            </a:r>
-          </a:p>
-          <a:p>
-            <a:pPr marL="180000" indent="-478483">
-              <a:spcBef>
-                <a:spcPts val="300"/>
-              </a:spcBef>
-              <a:buFont typeface="+mj-lt"/>
-              <a:buAutoNum type="arabicPeriod"/>
-            </a:pPr>
-            <a:r>
-              <a:rPr lang="en-GB" sz="1100" dirty="0"/>
-              <a:t>Using the timer0 overflow, 8bit timer, 16bit timer to flash the LEDs</a:t>
-            </a:r>
-          </a:p>
-          <a:p>
-            <a:pPr marL="180000" indent="-478483">
-              <a:spcBef>
-                <a:spcPts val="300"/>
-              </a:spcBef>
-              <a:buFont typeface="+mj-lt"/>
-              <a:buAutoNum type="arabicPeriod"/>
-            </a:pPr>
-            <a:r>
-              <a:rPr lang="en-GB" sz="1100" dirty="0"/>
-              <a:t>Using </a:t>
-            </a:r>
-            <a:r>
-              <a:rPr lang="en-GB" sz="1100" dirty="0" err="1"/>
-              <a:t>EEProm</a:t>
-            </a:r>
-            <a:r>
-              <a:rPr lang="en-GB" sz="1100" dirty="0"/>
-              <a:t> – showing values on the serial terminal, and more constants insights</a:t>
-            </a:r>
-          </a:p>
-          <a:p>
-            <a:pPr marL="180000" indent="-478483">
-              <a:spcBef>
-                <a:spcPts val="300"/>
-              </a:spcBef>
-              <a:buFont typeface="+mj-lt"/>
-              <a:buAutoNum type="arabicPeriod"/>
-            </a:pPr>
-            <a:r>
-              <a:rPr lang="en-GB" sz="1100" dirty="0"/>
-              <a:t>Using I2C with serial to discover I2C devices</a:t>
-            </a:r>
-          </a:p>
-          <a:p>
-            <a:pPr marL="180000" indent="-478483">
-              <a:spcBef>
-                <a:spcPts val="300"/>
-              </a:spcBef>
-              <a:buFont typeface="+mj-lt"/>
-              <a:buAutoNum type="arabicPeriod"/>
-            </a:pPr>
-            <a:r>
-              <a:rPr lang="en-GB" sz="1100" dirty="0"/>
-              <a:t>Using an I2C GCLD display</a:t>
-            </a:r>
-          </a:p>
-          <a:p>
-            <a:pPr marL="180000" indent="-478483">
-              <a:spcBef>
-                <a:spcPts val="300"/>
-              </a:spcBef>
-              <a:buFont typeface="+mj-lt"/>
-              <a:buAutoNum type="arabicPeriod"/>
-            </a:pPr>
-            <a:r>
-              <a:rPr lang="en-GB" sz="1100" dirty="0"/>
-              <a:t>Using a SPI GCLD display</a:t>
-            </a:r>
-          </a:p>
-          <a:p>
-            <a:pPr marL="180000" indent="-478483">
-              <a:spcBef>
-                <a:spcPts val="300"/>
-              </a:spcBef>
-              <a:buFont typeface="+mj-lt"/>
-              <a:buAutoNum type="arabicPeriod"/>
-            </a:pPr>
-            <a:r>
-              <a:rPr lang="en-GB" sz="1100" dirty="0"/>
-              <a:t>Using PWM, </a:t>
-            </a:r>
-            <a:r>
-              <a:rPr lang="en-GB" sz="1100" dirty="0" smtClean="0"/>
-              <a:t>many  </a:t>
-            </a:r>
-            <a:r>
-              <a:rPr lang="en-GB" sz="1100" dirty="0"/>
-              <a:t>ways,  to dim the LEDS</a:t>
-            </a:r>
-          </a:p>
-          <a:p>
-            <a:pPr marL="180000" indent="-478483">
-              <a:spcBef>
-                <a:spcPts val="300"/>
-              </a:spcBef>
-              <a:buFont typeface="+mj-lt"/>
-              <a:buAutoNum type="arabicPeriod"/>
-            </a:pPr>
-            <a:r>
-              <a:rPr lang="en-GB" sz="1100" dirty="0"/>
-              <a:t>Using an external interrupt to control an LED</a:t>
-            </a:r>
-          </a:p>
-          <a:p>
-            <a:pPr marL="180000" indent="-478483">
-              <a:spcBef>
-                <a:spcPts val="300"/>
-              </a:spcBef>
-              <a:buFont typeface="+mj-lt"/>
-              <a:buAutoNum type="arabicPeriod"/>
-            </a:pPr>
-            <a:r>
-              <a:rPr lang="en-GB" sz="1100" dirty="0"/>
-              <a:t>Using storage within the chip – </a:t>
-            </a:r>
-            <a:r>
-              <a:rPr lang="en-GB" sz="1100" dirty="0" err="1"/>
-              <a:t>Progmem</a:t>
-            </a:r>
-            <a:r>
-              <a:rPr lang="en-GB" sz="1100" dirty="0"/>
-              <a:t>, SAF memory, EEPROM and DATA blocks</a:t>
-            </a:r>
-          </a:p>
-          <a:p>
-            <a:pPr marL="180000" indent="-478483">
-              <a:spcBef>
-                <a:spcPts val="300"/>
-              </a:spcBef>
-              <a:buFont typeface="+mj-lt"/>
-              <a:buAutoNum type="arabicPeriod"/>
-            </a:pPr>
-            <a:r>
-              <a:rPr lang="en-GB" sz="1100" dirty="0"/>
-              <a:t>Using CLC</a:t>
-            </a:r>
-          </a:p>
-          <a:p>
-            <a:pPr marL="180000" indent="-478483">
-              <a:spcBef>
-                <a:spcPts val="300"/>
-              </a:spcBef>
-              <a:buFont typeface="+mj-lt"/>
-              <a:buAutoNum type="arabicPeriod"/>
-            </a:pPr>
-            <a:r>
-              <a:rPr lang="en-GB" sz="1100" dirty="0"/>
-              <a:t>The GCBASIC tool chain</a:t>
-            </a:r>
-          </a:p>
-          <a:p>
-            <a:pPr marL="180000" indent="-478483">
-              <a:spcBef>
-                <a:spcPts val="300"/>
-              </a:spcBef>
-              <a:buFont typeface="+mj-lt"/>
-              <a:buAutoNum type="arabicPeriod"/>
-            </a:pPr>
-            <a:r>
-              <a:rPr lang="en-GB" sz="1100" dirty="0"/>
-              <a:t>Assembly , alternatives assemblers and MPLAB-X</a:t>
-            </a:r>
-          </a:p>
-          <a:p>
-            <a:pPr marL="180000" indent="-478483">
-              <a:spcBef>
-                <a:spcPts val="300"/>
-              </a:spcBef>
-              <a:buFont typeface="+mj-lt"/>
-              <a:buAutoNum type="arabicPeriod"/>
-            </a:pPr>
-            <a:r>
-              <a:rPr lang="en-GB" sz="1100" dirty="0"/>
-              <a:t>Summary</a:t>
-            </a:r>
-          </a:p>
-          <a:p>
-            <a:pPr marL="180000" indent="-478483">
-              <a:spcBef>
-                <a:spcPts val="300"/>
-              </a:spcBef>
-              <a:buFont typeface="+mj-lt"/>
-              <a:buAutoNum type="arabicPeriod"/>
-            </a:pPr>
-            <a:endParaRPr lang="en-GB" sz="400" dirty="0" smtClean="0">
-              <a:solidFill>
-                <a:schemeClr val="bg1">
-                  <a:lumMod val="75000"/>
-                </a:schemeClr>
-              </a:solidFill>
-            </a:endParaRPr>
-          </a:p>
-          <a:p>
-            <a:pPr marL="180000" indent="-478483">
-              <a:spcBef>
-                <a:spcPts val="300"/>
-              </a:spcBef>
-              <a:buNone/>
-            </a:pPr>
-            <a:endParaRPr lang="en-GB" sz="700" dirty="0" smtClean="0"/>
-          </a:p>
-          <a:p>
-            <a:pPr marL="180000" indent="-478483">
-              <a:spcBef>
-                <a:spcPts val="300"/>
-              </a:spcBef>
-              <a:buFont typeface="+mj-lt"/>
-              <a:buAutoNum type="arabicPeriod"/>
-            </a:pPr>
-            <a:endParaRPr lang="en-GB" sz="700" dirty="0" smtClean="0"/>
-          </a:p>
-          <a:p>
-            <a:pPr marL="180000" indent="-478483">
-              <a:spcBef>
-                <a:spcPts val="300"/>
-              </a:spcBef>
-              <a:buFont typeface="+mj-lt"/>
-              <a:buAutoNum type="arabicPeriod"/>
-            </a:pPr>
-            <a:endParaRPr lang="en-GB" sz="500" dirty="0" smtClean="0"/>
-          </a:p>
-          <a:p>
-            <a:pPr marL="180000" indent="-478483">
-              <a:spcBef>
-                <a:spcPts val="300"/>
-              </a:spcBef>
-              <a:buFont typeface="+mj-lt"/>
-              <a:buAutoNum type="arabicPeriod"/>
-            </a:pPr>
-            <a:endParaRPr lang="en-GB" sz="500" dirty="0" smtClean="0"/>
-          </a:p>
-          <a:p>
-            <a:pPr marL="180000" indent="-478483">
-              <a:spcBef>
-                <a:spcPts val="300"/>
-              </a:spcBef>
-              <a:buFont typeface="+mj-lt"/>
-              <a:buAutoNum type="arabicPeriod"/>
-            </a:pPr>
-            <a:endParaRPr lang="en-GB" sz="500" dirty="0" smtClean="0"/>
-          </a:p>
-          <a:p>
-            <a:pPr marL="180000" indent="-478483">
-              <a:spcBef>
-                <a:spcPts val="300"/>
-              </a:spcBef>
-              <a:buFont typeface="+mj-lt"/>
-              <a:buAutoNum type="arabicPeriod"/>
-            </a:pPr>
-            <a:endParaRPr lang="en-GB" sz="500" dirty="0"/>
+              <a:t>Hello World – basic LED operation</a:t>
+            </a:r>
+          </a:p>
+          <a:p>
+            <a:r>
+              <a:rPr lang="en-GB" dirty="0" smtClean="0"/>
+              <a:t>Blink </a:t>
+            </a:r>
+            <a:r>
+              <a:rPr lang="en-GB" dirty="0" smtClean="0"/>
+              <a:t>the LED</a:t>
+            </a:r>
+          </a:p>
+          <a:p>
+            <a:pPr lvl="1"/>
+            <a:r>
+              <a:rPr lang="en-GB" dirty="0" smtClean="0"/>
+              <a:t>Direct addressing of register</a:t>
+            </a:r>
+          </a:p>
+          <a:p>
+            <a:r>
+              <a:rPr lang="en-GB" dirty="0" smtClean="0"/>
+              <a:t>Blink the LED</a:t>
+            </a:r>
+          </a:p>
+          <a:p>
+            <a:pPr lvl="1"/>
+            <a:r>
+              <a:rPr lang="en-GB" dirty="0" smtClean="0"/>
+              <a:t>Introduce CONSTANTS</a:t>
+            </a:r>
+          </a:p>
+          <a:p>
+            <a:pPr lvl="2"/>
+            <a:r>
+              <a:rPr lang="en-GB" dirty="0" smtClean="0"/>
+              <a:t>#DEFINE</a:t>
+            </a:r>
+          </a:p>
+          <a:p>
+            <a:pPr lvl="1"/>
+            <a:r>
+              <a:rPr lang="en-GB" dirty="0" smtClean="0"/>
+              <a:t>GCBASIC commands</a:t>
+            </a:r>
+          </a:p>
+          <a:p>
+            <a:pPr lvl="2"/>
+            <a:r>
+              <a:rPr lang="en-GB" dirty="0" smtClean="0"/>
+              <a:t>DIR</a:t>
+            </a:r>
+          </a:p>
+          <a:p>
+            <a:pPr lvl="2"/>
+            <a:r>
+              <a:rPr lang="en-GB" dirty="0" smtClean="0"/>
+              <a:t>WAIT</a:t>
+            </a:r>
+          </a:p>
+          <a:p>
+            <a:pPr lvl="2"/>
+            <a:endParaRPr lang="en-GB" dirty="0" smtClean="0"/>
+          </a:p>
+          <a:p>
+            <a:pPr lvl="2"/>
+            <a:endParaRPr lang="en-GB" dirty="0" smtClean="0"/>
+          </a:p>
+          <a:p>
+            <a:pPr lvl="1"/>
+            <a:endParaRPr lang="en-GB" dirty="0" smtClean="0"/>
           </a:p>
         </p:txBody>
       </p:sp>
     </p:spTree>
     <p:extLst>
       <p:ext uri="{BB962C8B-B14F-4D97-AF65-F5344CB8AC3E}">
-        <p14:creationId xmlns:p14="http://schemas.microsoft.com/office/powerpoint/2010/main" val="2888874992"/>
+        <p14:creationId xmlns:p14="http://schemas.microsoft.com/office/powerpoint/2010/main" val="2851363068"/>
       </p:ext>
     </p:extLst>
   </p:cSld>
@@ -8925,6 +8952,539 @@
             <a:spLocks noGrp="1"/>
           </p:cNvSpPr>
           <p:nvPr>
+            <p:ph type="title"/>
+          </p:nvPr>
+        </p:nvSpPr>
+        <p:spPr/>
+        <p:txBody>
+          <a:bodyPr/>
+          <a:lstStyle/>
+          <a:p>
+            <a:endParaRPr lang="en-GB"/>
+          </a:p>
+        </p:txBody>
+      </p:sp>
+      <p:sp>
+        <p:nvSpPr>
+          <p:cNvPr id="3" name="Content Placeholder 2"/>
+          <p:cNvSpPr>
+            <a:spLocks noGrp="1"/>
+          </p:cNvSpPr>
+          <p:nvPr>
+            <p:ph idx="1"/>
+          </p:nvPr>
+        </p:nvSpPr>
+        <p:spPr/>
+        <p:txBody>
+          <a:bodyPr/>
+          <a:lstStyle/>
+          <a:p>
+            <a:endParaRPr lang="en-GB"/>
+          </a:p>
+        </p:txBody>
+      </p:sp>
+    </p:spTree>
+  </p:cSld>
+  <p:clrMapOvr>
+    <a:masterClrMapping/>
+  </p:clrMapOvr>
+  <mc:AlternateContent xmlns:mc="http://schemas.openxmlformats.org/markup-compatibility/2006" xmlns:p14="http://schemas.microsoft.com/office/powerpoint/2010/main">
+    <mc:Choice Requires="p14">
+      <p:transition spd="slow" p14:dur="2000"/>
+    </mc:Choice>
+    <mc:Fallback xmlns="">
+      <p:transition spd="slow"/>
+    </mc:Fallback>
+  </mc:AlternateContent>
+  <p:timing>
+    <p:tnLst>
+      <p:par>
+        <p:cTn id="1" dur="indefinite" restart="never" nodeType="tmRoot"/>
+      </p:par>
+    </p:tnLst>
+  </p:timing>
+</p:sld>
+</file>
+
+<file path=ppt/slides/slide14.xml><?xml version="1.0" encoding="utf-8"?>
+<p:sld xmlns:a="http://schemas.openxmlformats.org/drawingml/2006/main" xmlns:r="http://schemas.openxmlformats.org/officeDocument/2006/relationships" xmlns:p="http://schemas.openxmlformats.org/presentationml/2006/main">
+  <p:cSld>
+    <p:spTree>
+      <p:nvGrpSpPr>
+        <p:cNvPr id="1" name=""/>
+        <p:cNvGrpSpPr/>
+        <p:nvPr/>
+      </p:nvGrpSpPr>
+      <p:grpSpPr>
+        <a:xfrm>
+          <a:off x="0" y="0"/>
+          <a:ext cx="0" cy="0"/>
+          <a:chOff x="0" y="0"/>
+          <a:chExt cx="0" cy="0"/>
+        </a:xfrm>
+      </p:grpSpPr>
+      <p:sp>
+        <p:nvSpPr>
+          <p:cNvPr id="2" name="Title 1"/>
+          <p:cNvSpPr>
+            <a:spLocks noGrp="1"/>
+          </p:cNvSpPr>
+          <p:nvPr>
+            <p:ph type="title"/>
+          </p:nvPr>
+        </p:nvSpPr>
+        <p:spPr/>
+        <p:txBody>
+          <a:bodyPr>
+            <a:normAutofit/>
+          </a:bodyPr>
+          <a:lstStyle/>
+          <a:p>
+            <a:r>
+              <a:rPr lang="en-GB" dirty="0" smtClean="0"/>
+              <a:t>Videos...</a:t>
+            </a:r>
+            <a:endParaRPr lang="en-GB" dirty="0"/>
+          </a:p>
+        </p:txBody>
+      </p:sp>
+      <p:sp>
+        <p:nvSpPr>
+          <p:cNvPr id="3" name="Content Placeholder 2"/>
+          <p:cNvSpPr>
+            <a:spLocks noGrp="1"/>
+          </p:cNvSpPr>
+          <p:nvPr>
+            <p:ph idx="1"/>
+          </p:nvPr>
+        </p:nvSpPr>
+        <p:spPr>
+          <a:xfrm>
+            <a:off x="467544" y="987574"/>
+            <a:ext cx="6447501" cy="4111476"/>
+          </a:xfrm>
+          <a:solidFill>
+            <a:schemeClr val="bg1"/>
+          </a:solidFill>
+        </p:spPr>
+        <p:txBody>
+          <a:bodyPr>
+            <a:noAutofit/>
+          </a:bodyPr>
+          <a:lstStyle/>
+          <a:p>
+            <a:pPr marL="180000" indent="-478483">
+              <a:spcBef>
+                <a:spcPts val="300"/>
+              </a:spcBef>
+              <a:buFont typeface="+mj-lt"/>
+              <a:buAutoNum type="arabicPeriod"/>
+            </a:pPr>
+            <a:r>
+              <a:rPr lang="en-GB" sz="1100" dirty="0"/>
+              <a:t>Install the hardware and make the board work – three LED programs</a:t>
+            </a:r>
+          </a:p>
+          <a:p>
+            <a:pPr marL="180000" indent="-478483">
+              <a:spcBef>
+                <a:spcPts val="300"/>
+              </a:spcBef>
+              <a:buFont typeface="+mj-lt"/>
+              <a:buAutoNum type="arabicPeriod"/>
+            </a:pPr>
+            <a:r>
+              <a:rPr lang="en-GB" sz="1100" b="1" dirty="0"/>
+              <a:t>Make  four LEDs flash in a sequence</a:t>
+            </a:r>
+          </a:p>
+          <a:p>
+            <a:pPr marL="180000" indent="-478483">
+              <a:spcBef>
+                <a:spcPts val="300"/>
+              </a:spcBef>
+              <a:buFont typeface="+mj-lt"/>
+              <a:buAutoNum type="arabicPeriod"/>
+            </a:pPr>
+            <a:r>
+              <a:rPr lang="en-GB" sz="1100" dirty="0"/>
+              <a:t>Set the LEDs to represent the value of ADC</a:t>
+            </a:r>
+          </a:p>
+          <a:p>
+            <a:pPr marL="180000" indent="-478483">
+              <a:spcBef>
+                <a:spcPts val="300"/>
+              </a:spcBef>
+              <a:buFont typeface="+mj-lt"/>
+              <a:buAutoNum type="arabicPeriod"/>
+            </a:pPr>
+            <a:r>
+              <a:rPr lang="en-GB" sz="1100" dirty="0"/>
+              <a:t>Sequence the LEDs with a delay using the value of ADC</a:t>
+            </a:r>
+          </a:p>
+          <a:p>
+            <a:pPr marL="180000" indent="-478483">
+              <a:spcBef>
+                <a:spcPts val="300"/>
+              </a:spcBef>
+              <a:buFont typeface="+mj-lt"/>
+              <a:buAutoNum type="arabicPeriod"/>
+            </a:pPr>
+            <a:r>
+              <a:rPr lang="en-GB" sz="1100" dirty="0"/>
+              <a:t>Using an input to set the state of the LEDs</a:t>
+            </a:r>
+          </a:p>
+          <a:p>
+            <a:pPr marL="180000" indent="-478483">
+              <a:spcBef>
+                <a:spcPts val="300"/>
+              </a:spcBef>
+              <a:buFont typeface="+mj-lt"/>
+              <a:buAutoNum type="arabicPeriod"/>
+            </a:pPr>
+            <a:r>
+              <a:rPr lang="en-GB" sz="1100" dirty="0"/>
+              <a:t>Using the reset switch</a:t>
+            </a:r>
+          </a:p>
+          <a:p>
+            <a:pPr marL="180000" indent="-478483">
+              <a:spcBef>
+                <a:spcPts val="300"/>
+              </a:spcBef>
+              <a:buFont typeface="+mj-lt"/>
+              <a:buAutoNum type="arabicPeriod"/>
+            </a:pPr>
+            <a:r>
+              <a:rPr lang="en-GB" sz="1100" dirty="0"/>
+              <a:t>Using the switch, ADC – make the LEDs flash in a sequence with reverse</a:t>
+            </a:r>
+          </a:p>
+          <a:p>
+            <a:pPr marL="180000" indent="-478483">
+              <a:spcBef>
+                <a:spcPts val="300"/>
+              </a:spcBef>
+              <a:buFont typeface="+mj-lt"/>
+              <a:buAutoNum type="arabicPeriod"/>
+            </a:pPr>
+            <a:r>
+              <a:rPr lang="en-GB" sz="1100" dirty="0"/>
+              <a:t>Using the serial to display values</a:t>
+            </a:r>
+          </a:p>
+          <a:p>
+            <a:pPr marL="180000" indent="-478483">
+              <a:spcBef>
+                <a:spcPts val="300"/>
+              </a:spcBef>
+              <a:buFont typeface="+mj-lt"/>
+              <a:buAutoNum type="arabicPeriod"/>
+            </a:pPr>
+            <a:r>
+              <a:rPr lang="en-GB" sz="1100" dirty="0"/>
+              <a:t>Using the timer0 overflow, 8bit timer, 16bit timer to flash the LEDs</a:t>
+            </a:r>
+          </a:p>
+          <a:p>
+            <a:pPr marL="180000" indent="-478483">
+              <a:spcBef>
+                <a:spcPts val="300"/>
+              </a:spcBef>
+              <a:buFont typeface="+mj-lt"/>
+              <a:buAutoNum type="arabicPeriod"/>
+            </a:pPr>
+            <a:r>
+              <a:rPr lang="en-GB" sz="1100" dirty="0"/>
+              <a:t>Using </a:t>
+            </a:r>
+            <a:r>
+              <a:rPr lang="en-GB" sz="1100" dirty="0" err="1"/>
+              <a:t>EEProm</a:t>
+            </a:r>
+            <a:r>
+              <a:rPr lang="en-GB" sz="1100" dirty="0"/>
+              <a:t> – showing values on the serial terminal, and more constants insights</a:t>
+            </a:r>
+          </a:p>
+          <a:p>
+            <a:pPr marL="180000" indent="-478483">
+              <a:spcBef>
+                <a:spcPts val="300"/>
+              </a:spcBef>
+              <a:buFont typeface="+mj-lt"/>
+              <a:buAutoNum type="arabicPeriod"/>
+            </a:pPr>
+            <a:r>
+              <a:rPr lang="en-GB" sz="1100" dirty="0"/>
+              <a:t>Using I2C with serial to discover I2C devices</a:t>
+            </a:r>
+          </a:p>
+          <a:p>
+            <a:pPr marL="180000" indent="-478483">
+              <a:spcBef>
+                <a:spcPts val="300"/>
+              </a:spcBef>
+              <a:buFont typeface="+mj-lt"/>
+              <a:buAutoNum type="arabicPeriod"/>
+            </a:pPr>
+            <a:r>
+              <a:rPr lang="en-GB" sz="1100" dirty="0"/>
+              <a:t>Using an I2C GCLD display</a:t>
+            </a:r>
+          </a:p>
+          <a:p>
+            <a:pPr marL="180000" indent="-478483">
+              <a:spcBef>
+                <a:spcPts val="300"/>
+              </a:spcBef>
+              <a:buFont typeface="+mj-lt"/>
+              <a:buAutoNum type="arabicPeriod"/>
+            </a:pPr>
+            <a:r>
+              <a:rPr lang="en-GB" sz="1100" dirty="0"/>
+              <a:t>Using a SPI GCLD display</a:t>
+            </a:r>
+          </a:p>
+          <a:p>
+            <a:pPr marL="180000" indent="-478483">
+              <a:spcBef>
+                <a:spcPts val="300"/>
+              </a:spcBef>
+              <a:buFont typeface="+mj-lt"/>
+              <a:buAutoNum type="arabicPeriod"/>
+            </a:pPr>
+            <a:r>
+              <a:rPr lang="en-GB" sz="1100" dirty="0"/>
+              <a:t>Using PWM, </a:t>
+            </a:r>
+            <a:r>
+              <a:rPr lang="en-GB" sz="1100" dirty="0" smtClean="0"/>
+              <a:t>many  </a:t>
+            </a:r>
+            <a:r>
+              <a:rPr lang="en-GB" sz="1100" dirty="0"/>
+              <a:t>ways,  to dim the LEDS</a:t>
+            </a:r>
+          </a:p>
+          <a:p>
+            <a:pPr marL="180000" indent="-478483">
+              <a:spcBef>
+                <a:spcPts val="300"/>
+              </a:spcBef>
+              <a:buFont typeface="+mj-lt"/>
+              <a:buAutoNum type="arabicPeriod"/>
+            </a:pPr>
+            <a:r>
+              <a:rPr lang="en-GB" sz="1100" dirty="0"/>
+              <a:t>Using an external interrupt to control an LED</a:t>
+            </a:r>
+          </a:p>
+          <a:p>
+            <a:pPr marL="180000" indent="-478483">
+              <a:spcBef>
+                <a:spcPts val="300"/>
+              </a:spcBef>
+              <a:buFont typeface="+mj-lt"/>
+              <a:buAutoNum type="arabicPeriod"/>
+            </a:pPr>
+            <a:r>
+              <a:rPr lang="en-GB" sz="1100" dirty="0"/>
+              <a:t>Using storage within the chip – </a:t>
+            </a:r>
+            <a:r>
+              <a:rPr lang="en-GB" sz="1100" dirty="0" err="1"/>
+              <a:t>Progmem</a:t>
+            </a:r>
+            <a:r>
+              <a:rPr lang="en-GB" sz="1100" dirty="0"/>
+              <a:t>, SAF memory, EEPROM and DATA blocks</a:t>
+            </a:r>
+          </a:p>
+          <a:p>
+            <a:pPr marL="180000" indent="-478483">
+              <a:spcBef>
+                <a:spcPts val="300"/>
+              </a:spcBef>
+              <a:buFont typeface="+mj-lt"/>
+              <a:buAutoNum type="arabicPeriod"/>
+            </a:pPr>
+            <a:r>
+              <a:rPr lang="en-GB" sz="1100" dirty="0"/>
+              <a:t>Using CLC</a:t>
+            </a:r>
+          </a:p>
+          <a:p>
+            <a:pPr marL="180000" indent="-478483">
+              <a:spcBef>
+                <a:spcPts val="300"/>
+              </a:spcBef>
+              <a:buFont typeface="+mj-lt"/>
+              <a:buAutoNum type="arabicPeriod"/>
+            </a:pPr>
+            <a:r>
+              <a:rPr lang="en-GB" sz="1100" dirty="0"/>
+              <a:t>The GCBASIC tool chain</a:t>
+            </a:r>
+          </a:p>
+          <a:p>
+            <a:pPr marL="180000" indent="-478483">
+              <a:spcBef>
+                <a:spcPts val="300"/>
+              </a:spcBef>
+              <a:buFont typeface="+mj-lt"/>
+              <a:buAutoNum type="arabicPeriod"/>
+            </a:pPr>
+            <a:r>
+              <a:rPr lang="en-GB" sz="1100" dirty="0"/>
+              <a:t>Assembly , alternatives assemblers and MPLAB-X</a:t>
+            </a:r>
+          </a:p>
+          <a:p>
+            <a:pPr marL="180000" indent="-478483">
+              <a:spcBef>
+                <a:spcPts val="300"/>
+              </a:spcBef>
+              <a:buFont typeface="+mj-lt"/>
+              <a:buAutoNum type="arabicPeriod"/>
+            </a:pPr>
+            <a:r>
+              <a:rPr lang="en-GB" sz="1100" dirty="0"/>
+              <a:t>Summary</a:t>
+            </a:r>
+          </a:p>
+          <a:p>
+            <a:pPr marL="180000" indent="-478483">
+              <a:spcBef>
+                <a:spcPts val="300"/>
+              </a:spcBef>
+              <a:buFont typeface="+mj-lt"/>
+              <a:buAutoNum type="arabicPeriod"/>
+            </a:pPr>
+            <a:endParaRPr lang="en-GB" sz="400" dirty="0" smtClean="0">
+              <a:solidFill>
+                <a:schemeClr val="bg1">
+                  <a:lumMod val="75000"/>
+                </a:schemeClr>
+              </a:solidFill>
+            </a:endParaRPr>
+          </a:p>
+          <a:p>
+            <a:pPr marL="180000" indent="-478483">
+              <a:spcBef>
+                <a:spcPts val="300"/>
+              </a:spcBef>
+              <a:buNone/>
+            </a:pPr>
+            <a:endParaRPr lang="en-GB" sz="700" dirty="0" smtClean="0"/>
+          </a:p>
+          <a:p>
+            <a:pPr marL="180000" indent="-478483">
+              <a:spcBef>
+                <a:spcPts val="300"/>
+              </a:spcBef>
+              <a:buFont typeface="+mj-lt"/>
+              <a:buAutoNum type="arabicPeriod"/>
+            </a:pPr>
+            <a:endParaRPr lang="en-GB" sz="700" dirty="0" smtClean="0"/>
+          </a:p>
+          <a:p>
+            <a:pPr marL="180000" indent="-478483">
+              <a:spcBef>
+                <a:spcPts val="300"/>
+              </a:spcBef>
+              <a:buFont typeface="+mj-lt"/>
+              <a:buAutoNum type="arabicPeriod"/>
+            </a:pPr>
+            <a:endParaRPr lang="en-GB" sz="500" dirty="0" smtClean="0"/>
+          </a:p>
+          <a:p>
+            <a:pPr marL="180000" indent="-478483">
+              <a:spcBef>
+                <a:spcPts val="300"/>
+              </a:spcBef>
+              <a:buFont typeface="+mj-lt"/>
+              <a:buAutoNum type="arabicPeriod"/>
+            </a:pPr>
+            <a:endParaRPr lang="en-GB" sz="500" dirty="0" smtClean="0"/>
+          </a:p>
+          <a:p>
+            <a:pPr marL="180000" indent="-478483">
+              <a:spcBef>
+                <a:spcPts val="300"/>
+              </a:spcBef>
+              <a:buFont typeface="+mj-lt"/>
+              <a:buAutoNum type="arabicPeriod"/>
+            </a:pPr>
+            <a:endParaRPr lang="en-GB" sz="500" dirty="0" smtClean="0"/>
+          </a:p>
+          <a:p>
+            <a:pPr marL="180000" indent="-478483">
+              <a:spcBef>
+                <a:spcPts val="300"/>
+              </a:spcBef>
+              <a:buFont typeface="+mj-lt"/>
+              <a:buAutoNum type="arabicPeriod"/>
+            </a:pPr>
+            <a:endParaRPr lang="en-GB" sz="500" dirty="0"/>
+          </a:p>
+        </p:txBody>
+      </p:sp>
+    </p:spTree>
+    <p:extLst>
+      <p:ext uri="{BB962C8B-B14F-4D97-AF65-F5344CB8AC3E}">
+        <p14:creationId xmlns:p14="http://schemas.microsoft.com/office/powerpoint/2010/main" val="2888874992"/>
+      </p:ext>
+    </p:extLst>
+  </p:cSld>
+  <p:clrMapOvr>
+    <a:masterClrMapping/>
+  </p:clrMapOvr>
+  <mc:AlternateContent xmlns:mc="http://schemas.openxmlformats.org/markup-compatibility/2006" xmlns:p14="http://schemas.microsoft.com/office/powerpoint/2010/main">
+    <mc:Choice Requires="p14">
+      <p:transition spd="slow" p14:dur="2000"/>
+    </mc:Choice>
+    <mc:Fallback xmlns="">
+      <p:transition spd="slow"/>
+    </mc:Fallback>
+  </mc:AlternateContent>
+  <p:timing>
+    <p:tnLst>
+      <p:par>
+        <p:cTn id="1" dur="indefinite" restart="never" nodeType="tmRoot"/>
+      </p:par>
+    </p:tnLst>
+  </p:timing>
+</p:sld>
+</file>
+
+<file path=ppt/slides/slide15.xml><?xml version="1.0" encoding="utf-8"?>
+<p:sld xmlns:a="http://schemas.openxmlformats.org/drawingml/2006/main" xmlns:r="http://schemas.openxmlformats.org/officeDocument/2006/relationships" xmlns:p="http://schemas.openxmlformats.org/presentationml/2006/main">
+  <p:cSld>
+    <p:spTree>
+      <p:nvGrpSpPr>
+        <p:cNvPr id="1" name=""/>
+        <p:cNvGrpSpPr/>
+        <p:nvPr/>
+      </p:nvGrpSpPr>
+      <p:grpSpPr>
+        <a:xfrm>
+          <a:off x="0" y="0"/>
+          <a:ext cx="0" cy="0"/>
+          <a:chOff x="0" y="0"/>
+          <a:chExt cx="0" cy="0"/>
+        </a:xfrm>
+      </p:grpSpPr>
+      <p:sp>
+        <p:nvSpPr>
+          <p:cNvPr id="2" name="Title 1"/>
+          <p:cNvSpPr>
+            <a:spLocks noGrp="1"/>
+          </p:cNvSpPr>
+          <p:nvPr>
             <p:ph type="ctrTitle"/>
           </p:nvPr>
         </p:nvSpPr>
@@ -8965,15 +9525,7 @@
           <a:p>
             <a:r>
               <a:rPr lang="en-GB" dirty="0" smtClean="0"/>
-              <a:t>GCBASIC  for the </a:t>
-            </a:r>
-            <a:r>
-              <a:rPr lang="en-GB" dirty="0" smtClean="0"/>
-              <a:t>PIC18FxxQ35 </a:t>
-            </a:r>
-            <a:r>
-              <a:rPr lang="en-GB" dirty="0" smtClean="0"/>
-              <a:t>chip Family</a:t>
+              <a:t>GCBASIC  for the PIC18FxxQ35 chip Family</a:t>
             </a:r>
             <a:endParaRPr lang="en-GB" dirty="0"/>
           </a:p>
@@ -9069,7 +9621,7 @@
 </p:sld>
 </file>
 
-<file path=ppt/slides/slide14.xml><?xml version="1.0" encoding="utf-8"?>
+<file path=ppt/slides/slide16.xml><?xml version="1.0" encoding="utf-8"?>
 <p:sld xmlns:a="http://schemas.openxmlformats.org/drawingml/2006/main" xmlns:r="http://schemas.openxmlformats.org/officeDocument/2006/relationships" xmlns:p="http://schemas.openxmlformats.org/presentationml/2006/main">
   <p:cSld>
     <p:spTree>
@@ -9405,41 +9957,8 @@
                   <a:srgbClr val="FF0000"/>
                 </a:solidFill>
               </a:rPr>
-              <a:t>Like and subscribe</a:t>
-            </a:r>
-            <a:r>
-              <a:rPr lang="en-US" sz="4000" b="1" dirty="0" smtClean="0">
-                <a:ln w="10541" cmpd="sng">
-                  <a:solidFill>
-                    <a:srgbClr val="7D7D7D">
-                      <a:tint val="100000"/>
-                      <a:shade val="100000"/>
-                      <a:satMod val="110000"/>
-                    </a:srgbClr>
-                  </a:solidFill>
-                  <a:prstDash val="solid"/>
-                </a:ln>
-                <a:solidFill>
-                  <a:srgbClr val="FF0000"/>
-                </a:solidFill>
-              </a:rPr>
-              <a:t>!</a:t>
-            </a:r>
-            <a:endParaRPr lang="en-US" sz="4000" b="1" dirty="0" smtClean="0">
-              <a:ln w="10541" cmpd="sng">
-                <a:solidFill>
-                  <a:srgbClr val="7D7D7D">
-                    <a:tint val="100000"/>
-                    <a:shade val="100000"/>
-                    <a:satMod val="110000"/>
-                  </a:srgbClr>
-                </a:solidFill>
-                <a:prstDash val="solid"/>
-              </a:ln>
-              <a:solidFill>
-                <a:srgbClr val="FF0000"/>
-              </a:solidFill>
-            </a:endParaRPr>
+              <a:t>Like and subscribe!</a:t>
+            </a:r>
           </a:p>
         </p:txBody>
       </p:sp>
@@ -9691,17 +10210,8 @@
           <a:p>
             <a:r>
               <a:rPr lang="en-GB" dirty="0" smtClean="0"/>
-              <a:t>PIC18FxxQ35  </a:t>
-            </a:r>
-            <a:r>
-              <a:rPr lang="en-GB" dirty="0" smtClean="0"/>
-              <a:t>is a high performance </a:t>
-            </a:r>
-            <a:r>
-              <a:rPr lang="en-GB" dirty="0" smtClean="0"/>
-              <a:t>PIC18</a:t>
-            </a:r>
-            <a:endParaRPr lang="en-GB" dirty="0" smtClean="0"/>
+              <a:t>PIC18FxxQ35  is a high performance PIC18</a:t>
+            </a:r>
           </a:p>
           <a:p>
             <a:pPr lvl="1"/>
@@ -9807,23 +10317,7 @@
           <a:p>
             <a:r>
               <a:rPr lang="en-GB" dirty="0" smtClean="0"/>
-              <a:t>The </a:t>
-            </a:r>
-            <a:r>
-              <a:rPr lang="en-GB" dirty="0" smtClean="0"/>
-              <a:t>PIC18FxxQ35 </a:t>
-            </a:r>
-            <a:r>
-              <a:rPr lang="en-GB" dirty="0" smtClean="0"/>
-              <a:t>offers </a:t>
-            </a:r>
-            <a:r>
-              <a:rPr lang="en-GB" dirty="0" smtClean="0"/>
-              <a:t>28</a:t>
-            </a:r>
-            <a:r>
-              <a:rPr lang="en-GB" dirty="0" smtClean="0"/>
-              <a:t>, 40 and 44-pin products in small footprint packages to support customers in a wide variety of applications. </a:t>
+              <a:t>The PIC18FxxQ35 offers 28, 40 and 44-pin products in small footprint packages to support customers in a wide variety of applications. </a:t>
             </a:r>
           </a:p>
           <a:p>
@@ -10411,8 +10905,8 @@
         </p:nvSpPr>
         <p:spPr>
           <a:xfrm>
-            <a:off x="3563888" y="2643758"/>
-            <a:ext cx="3528392" cy="1393943"/>
+            <a:off x="2771800" y="3136683"/>
+            <a:ext cx="4320480" cy="1393943"/>
           </a:xfrm>
           <a:prstGeom prst="rect">
             <a:avLst/>
@@ -10427,24 +10921,21 @@
           <a:p>
             <a:r>
               <a:rPr lang="en-GB" dirty="0" smtClean="0"/>
-              <a:t>GCBASIC is an Open Source compiler for PIC and AVR microcontrollers</a:t>
-            </a:r>
-          </a:p>
-          <a:p>
+              <a:t>GCBASIC is an Open Source compiler for </a:t>
+            </a:r>
+            <a:r>
+              <a:rPr lang="en-GB" dirty="0" smtClean="0"/>
+              <a:t>PIC, AVR and LGT microcontrollers</a:t>
+            </a:r>
             <a:endParaRPr lang="en-GB" dirty="0" smtClean="0"/>
           </a:p>
           <a:p>
+            <a:endParaRPr lang="en-GB" dirty="0" smtClean="0"/>
+          </a:p>
+          <a:p>
             <a:r>
               <a:rPr lang="en-GB" dirty="0" smtClean="0"/>
-              <a:t>GCBASIC now supports the </a:t>
-            </a:r>
-            <a:r>
-              <a:rPr lang="en-GB" dirty="0" smtClean="0"/>
-              <a:t>18FxxQ35 </a:t>
-            </a:r>
-            <a:r>
-              <a:rPr lang="en-GB" dirty="0" smtClean="0"/>
-              <a:t>chip family</a:t>
+              <a:t>GCBASIC now supports the 18FxxQ35 chip family</a:t>
             </a:r>
             <a:endParaRPr lang="en-GB" dirty="0"/>
           </a:p>
@@ -10552,11 +11043,18 @@
             </a:pPr>
             <a:r>
               <a:rPr lang="en-GB" dirty="0" smtClean="0">
+                <a:solidFill>
+                  <a:schemeClr val="accent1"/>
+                </a:solidFill>
                 <a:hlinkClick r:id="rId3"/>
               </a:rPr>
               <a:t>https://www.youtube.com/watch?v=5yo5poUmnoA</a:t>
             </a:r>
-            <a:endParaRPr lang="en-GB" dirty="0" smtClean="0"/>
+            <a:endParaRPr lang="en-GB" dirty="0" smtClean="0">
+              <a:solidFill>
+                <a:schemeClr val="accent1"/>
+              </a:solidFill>
+            </a:endParaRPr>
           </a:p>
           <a:p>
             <a:pPr marL="478483" indent="-478483">
@@ -10575,15 +11073,7 @@
             </a:pPr>
             <a:r>
               <a:rPr lang="en-GB" dirty="0" smtClean="0"/>
-              <a:t>Test that you have the </a:t>
-            </a:r>
-            <a:r>
-              <a:rPr lang="en-GB" dirty="0" smtClean="0"/>
-              <a:t>18FxxQ35 </a:t>
-            </a:r>
-            <a:r>
-              <a:rPr lang="en-GB" dirty="0" smtClean="0"/>
-              <a:t>attached</a:t>
+              <a:t>Test that you have the 18FxxQ35 attached</a:t>
             </a:r>
           </a:p>
           <a:p>
@@ -10705,6 +11195,47 @@
           </a:p>
         </p:txBody>
       </p:sp>
+      <p:pic>
+        <p:nvPicPr>
+          <p:cNvPr id="2050" name="Picture 2" descr="https://media.microchip.com/assets/a/0/d/e/2d845af19ab8c760f9d639464f81.l.png"/>
+          <p:cNvPicPr>
+            <a:picLocks noChangeAspect="1" noChangeArrowheads="1"/>
+          </p:cNvPicPr>
+          <p:nvPr/>
+        </p:nvPicPr>
+        <p:blipFill>
+          <a:blip r:embed="rId2">
+            <a:extLst>
+              <a:ext uri="{28A0092B-C50C-407E-A947-70E740481C1C}">
+                <a14:useLocalDpi xmlns:a14="http://schemas.microsoft.com/office/drawing/2010/main" val="0"/>
+              </a:ext>
+            </a:extLst>
+          </a:blip>
+          <a:srcRect/>
+          <a:stretch>
+            <a:fillRect/>
+          </a:stretch>
+        </p:blipFill>
+        <p:spPr bwMode="auto">
+          <a:xfrm>
+            <a:off x="2771800" y="1059582"/>
+            <a:ext cx="5971892" cy="3534148"/>
+          </a:xfrm>
+          <a:prstGeom prst="rect">
+            <a:avLst/>
+          </a:prstGeom>
+          <a:noFill/>
+          <a:extLst>
+            <a:ext uri="{909E8E84-426E-40DD-AFC4-6F175D3DCCD1}">
+              <a14:hiddenFill xmlns:a14="http://schemas.microsoft.com/office/drawing/2010/main">
+                <a:solidFill>
+                  <a:srgbClr val="FFFFFF"/>
+                </a:solidFill>
+              </a14:hiddenFill>
+            </a:ext>
+          </a:extLst>
+        </p:spPr>
+      </p:pic>
     </p:spTree>
   </p:cSld>
   <p:clrMapOvr>
@@ -10745,6 +11276,374 @@
           <a:chExt cx="0" cy="0"/>
         </a:xfrm>
       </p:grpSpPr>
+      <p:pic>
+        <p:nvPicPr>
+          <p:cNvPr id="1026" name="Picture 2"/>
+          <p:cNvPicPr>
+            <a:picLocks noChangeAspect="1" noChangeArrowheads="1"/>
+          </p:cNvPicPr>
+          <p:nvPr/>
+        </p:nvPicPr>
+        <p:blipFill rotWithShape="1">
+          <a:blip r:embed="rId2">
+            <a:extLst>
+              <a:ext uri="{28A0092B-C50C-407E-A947-70E740481C1C}">
+                <a14:useLocalDpi xmlns:a14="http://schemas.microsoft.com/office/drawing/2010/main" val="0"/>
+              </a:ext>
+            </a:extLst>
+          </a:blip>
+          <a:srcRect l="3048" t="6534" r="2270" b="5416"/>
+          <a:stretch/>
+        </p:blipFill>
+        <p:spPr bwMode="auto">
+          <a:xfrm>
+            <a:off x="251518" y="1026170"/>
+            <a:ext cx="4635501" cy="4000500"/>
+          </a:xfrm>
+          <a:prstGeom prst="rect">
+            <a:avLst/>
+          </a:prstGeom>
+          <a:noFill/>
+          <a:ln>
+            <a:noFill/>
+          </a:ln>
+          <a:effectLst/>
+          <a:extLst>
+            <a:ext uri="{909E8E84-426E-40DD-AFC4-6F175D3DCCD1}">
+              <a14:hiddenFill xmlns:a14="http://schemas.microsoft.com/office/drawing/2010/main">
+                <a:solidFill>
+                  <a:schemeClr val="accent1"/>
+                </a:solidFill>
+              </a14:hiddenFill>
+            </a:ext>
+            <a:ext uri="{91240B29-F687-4F45-9708-019B960494DF}">
+              <a14:hiddenLine xmlns:a14="http://schemas.microsoft.com/office/drawing/2010/main" w="9525">
+                <a:solidFill>
+                  <a:schemeClr val="tx1"/>
+                </a:solidFill>
+                <a:miter lim="800000"/>
+                <a:headEnd/>
+                <a:tailEnd/>
+              </a14:hiddenLine>
+            </a:ext>
+            <a:ext uri="{AF507438-7753-43E0-B8FC-AC1667EBCBE1}">
+              <a14:hiddenEffects xmlns:a14="http://schemas.microsoft.com/office/drawing/2010/main">
+                <a:effectLst>
+                  <a:outerShdw dist="35921" dir="2700000" algn="ctr" rotWithShape="0">
+                    <a:schemeClr val="bg2"/>
+                  </a:outerShdw>
+                </a:effectLst>
+              </a14:hiddenEffects>
+            </a:ext>
+          </a:extLst>
+        </p:spPr>
+      </p:pic>
+      <p:sp>
+        <p:nvSpPr>
+          <p:cNvPr id="4" name="Rectangle 3"/>
+          <p:cNvSpPr/>
+          <p:nvPr/>
+        </p:nvSpPr>
+        <p:spPr>
+          <a:xfrm>
+            <a:off x="0" y="103003"/>
+            <a:ext cx="6367321" cy="884571"/>
+          </a:xfrm>
+          <a:prstGeom prst="rect">
+            <a:avLst/>
+          </a:prstGeom>
+          <a:solidFill>
+            <a:schemeClr val="bg1"/>
+          </a:solidFill>
+        </p:spPr>
+        <p:txBody>
+          <a:bodyPr vert="horz" lIns="68580" tIns="34290" rIns="68580" bIns="34290" rtlCol="0" anchor="t">
+            <a:normAutofit lnSpcReduction="10000"/>
+          </a:bodyPr>
+          <a:lstStyle/>
+          <a:p>
+            <a:pPr defTabSz="342900">
+              <a:spcBef>
+                <a:spcPct val="0"/>
+              </a:spcBef>
+            </a:pPr>
+            <a:r>
+              <a:rPr lang="en-GB" sz="2700" dirty="0">
+                <a:solidFill>
+                  <a:schemeClr val="accent1"/>
+                </a:solidFill>
+                <a:latin typeface="+mj-lt"/>
+                <a:ea typeface="+mj-ea"/>
+                <a:cs typeface="+mj-cs"/>
+              </a:rPr>
+              <a:t>PICDEM 2 Plus </a:t>
+            </a:r>
+            <a:r>
+              <a:rPr lang="en-GB" sz="2700" dirty="0" smtClean="0">
+                <a:solidFill>
+                  <a:schemeClr val="accent1"/>
+                </a:solidFill>
+                <a:latin typeface="+mj-lt"/>
+                <a:ea typeface="+mj-ea"/>
+                <a:cs typeface="+mj-cs"/>
+              </a:rPr>
+              <a:t>Demonstration</a:t>
+            </a:r>
+          </a:p>
+          <a:p>
+            <a:pPr defTabSz="342900">
+              <a:spcBef>
+                <a:spcPct val="0"/>
+              </a:spcBef>
+            </a:pPr>
+            <a:r>
+              <a:rPr lang="en-GB" sz="2700" dirty="0" smtClean="0">
+                <a:solidFill>
+                  <a:schemeClr val="accent1"/>
+                </a:solidFill>
+                <a:latin typeface="+mj-lt"/>
+                <a:ea typeface="+mj-ea"/>
+                <a:cs typeface="+mj-cs"/>
+              </a:rPr>
+              <a:t>Board </a:t>
+            </a:r>
+            <a:endParaRPr lang="en-GB" sz="2700" dirty="0">
+              <a:solidFill>
+                <a:schemeClr val="accent1"/>
+              </a:solidFill>
+              <a:latin typeface="+mj-lt"/>
+              <a:ea typeface="+mj-ea"/>
+              <a:cs typeface="+mj-cs"/>
+            </a:endParaRPr>
+          </a:p>
+        </p:txBody>
+      </p:sp>
+      <p:sp>
+        <p:nvSpPr>
+          <p:cNvPr id="3" name="Rectangle 2"/>
+          <p:cNvSpPr/>
+          <p:nvPr/>
+        </p:nvSpPr>
+        <p:spPr>
+          <a:xfrm>
+            <a:off x="5004048" y="75944"/>
+            <a:ext cx="3995936" cy="5016758"/>
+          </a:xfrm>
+          <a:prstGeom prst="rect">
+            <a:avLst/>
+          </a:prstGeom>
+          <a:solidFill>
+            <a:schemeClr val="bg1"/>
+          </a:solidFill>
+        </p:spPr>
+        <p:txBody>
+          <a:bodyPr wrap="square">
+            <a:spAutoFit/>
+          </a:bodyPr>
+          <a:lstStyle/>
+          <a:p>
+            <a:r>
+              <a:rPr lang="en-GB" sz="1000" dirty="0" smtClean="0"/>
+              <a:t>1</a:t>
+            </a:r>
+            <a:r>
+              <a:rPr lang="en-GB" sz="1000" dirty="0"/>
+              <a:t>. 18-, 28- and 40-pin DIP sockets</a:t>
+            </a:r>
+          </a:p>
+          <a:p>
+            <a:r>
+              <a:rPr lang="en-GB" sz="1000" dirty="0"/>
+              <a:t>(although three sockets are provided, only one device may be used at a time)</a:t>
+            </a:r>
+          </a:p>
+          <a:p>
+            <a:r>
+              <a:rPr lang="en-GB" sz="1000" dirty="0"/>
+              <a:t>2. On-board, +5V regulator for direct input from 9V, 100 mA AC/DC wall adapter or</a:t>
+            </a:r>
+          </a:p>
+          <a:p>
+            <a:r>
+              <a:rPr lang="en-GB" sz="1000" dirty="0"/>
+              <a:t>9V battery, or hooks for a +5V, 100 mA regulated DC supply</a:t>
+            </a:r>
+          </a:p>
+          <a:p>
+            <a:r>
+              <a:rPr lang="en-GB" sz="1000" dirty="0"/>
+              <a:t>3. RS-232 socket and associated hardware for direct connection to an RS-232</a:t>
+            </a:r>
+          </a:p>
+          <a:p>
+            <a:r>
+              <a:rPr lang="en-GB" sz="1000" dirty="0"/>
+              <a:t>interface</a:t>
+            </a:r>
+          </a:p>
+          <a:p>
+            <a:r>
+              <a:rPr lang="en-GB" sz="1000" dirty="0"/>
+              <a:t>4. Programmer/debugger connectivity supporting MPLAB® ICD 3, MPLAB REAL</a:t>
+            </a:r>
+          </a:p>
+          <a:p>
+            <a:r>
+              <a:rPr lang="en-GB" sz="1000" dirty="0"/>
+              <a:t>ICE and </a:t>
+            </a:r>
+            <a:r>
+              <a:rPr lang="en-GB" sz="1000" dirty="0" err="1"/>
+              <a:t>PICkit</a:t>
+            </a:r>
+            <a:r>
+              <a:rPr lang="en-GB" sz="1000" dirty="0"/>
+              <a:t> 3</a:t>
+            </a:r>
+          </a:p>
+          <a:p>
+            <a:r>
+              <a:rPr lang="en-GB" sz="1000" dirty="0"/>
+              <a:t>5. </a:t>
+            </a:r>
+            <a:r>
+              <a:rPr lang="en-GB" sz="1000" dirty="0" err="1"/>
+              <a:t>PICkit</a:t>
+            </a:r>
+            <a:r>
+              <a:rPr lang="en-GB" sz="1000" dirty="0"/>
+              <a:t> Serial Connector for analysis of serial communications peripherals such</a:t>
+            </a:r>
+          </a:p>
+          <a:p>
+            <a:r>
+              <a:rPr lang="en-GB" sz="1000" dirty="0"/>
+              <a:t>as SPI or I2C™</a:t>
+            </a:r>
+          </a:p>
+          <a:p>
+            <a:r>
+              <a:rPr lang="en-GB" sz="1000" dirty="0"/>
+              <a:t>6. 5 k pot for devices with </a:t>
+            </a:r>
+            <a:r>
+              <a:rPr lang="en-GB" sz="1000" dirty="0" err="1"/>
+              <a:t>analog</a:t>
+            </a:r>
+            <a:r>
+              <a:rPr lang="en-GB" sz="1000" dirty="0"/>
+              <a:t> inputs</a:t>
+            </a:r>
+          </a:p>
+          <a:p>
+            <a:r>
+              <a:rPr lang="en-GB" sz="1000" dirty="0"/>
+              <a:t>7. Three push button switches for external stimulus and Reset</a:t>
+            </a:r>
+          </a:p>
+          <a:p>
+            <a:r>
+              <a:rPr lang="en-GB" sz="1000" dirty="0"/>
+              <a:t>8. Power-on indicator LED</a:t>
+            </a:r>
+          </a:p>
+          <a:p>
+            <a:r>
+              <a:rPr lang="en-GB" sz="1000" dirty="0"/>
+              <a:t>9. Four LEDs connected to PORTB</a:t>
+            </a:r>
+          </a:p>
+          <a:p>
+            <a:r>
+              <a:rPr lang="en-GB" sz="1000" dirty="0"/>
+              <a:t>10. On-board external oscillators including:</a:t>
+            </a:r>
+          </a:p>
+          <a:p>
+            <a:r>
+              <a:rPr lang="en-GB" sz="1000" dirty="0"/>
+              <a:t>a) Unpopulated DIP socket for canned crystal oscillator (Y2)</a:t>
+            </a:r>
+          </a:p>
+          <a:p>
+            <a:r>
+              <a:rPr lang="en-GB" sz="1000" dirty="0"/>
+              <a:t>b) RC oscillator circuit (R4, C3)</a:t>
+            </a:r>
+          </a:p>
+          <a:p>
+            <a:r>
+              <a:rPr lang="en-GB" sz="1000" dirty="0"/>
+              <a:t>c) Unpopulated holes for crystal connection (Y1)</a:t>
+            </a:r>
+          </a:p>
+          <a:p>
+            <a:r>
+              <a:rPr lang="en-GB" sz="1000" dirty="0"/>
+              <a:t>d) 32.768 kHz crystal for Timer1 clock operation (Y3)</a:t>
+            </a:r>
+            <a:br>
+              <a:rPr lang="en-GB" sz="1000" dirty="0"/>
+            </a:br>
+            <a:r>
+              <a:rPr lang="en-GB" sz="1000" dirty="0"/>
+              <a:t>11. 32K x 8 Serial EEPROM</a:t>
+            </a:r>
+          </a:p>
+          <a:p>
+            <a:r>
+              <a:rPr lang="en-GB" sz="1000" dirty="0"/>
+              <a:t>12. LCD display</a:t>
+            </a:r>
+          </a:p>
+          <a:p>
+            <a:r>
+              <a:rPr lang="en-GB" sz="1000" dirty="0"/>
+              <a:t>13. </a:t>
+            </a:r>
+            <a:r>
+              <a:rPr lang="en-GB" sz="1000" dirty="0" err="1"/>
+              <a:t>Piezo</a:t>
+            </a:r>
+            <a:r>
+              <a:rPr lang="en-GB" sz="1000" dirty="0"/>
+              <a:t> buzzer</a:t>
+            </a:r>
+          </a:p>
+          <a:p>
+            <a:r>
+              <a:rPr lang="en-GB" sz="1000" dirty="0"/>
+              <a:t>14. Prototype area for user hardware</a:t>
+            </a:r>
+          </a:p>
+          <a:p>
+            <a:r>
+              <a:rPr lang="en-GB" sz="1000" dirty="0"/>
+              <a:t>15. Expansion Header for </a:t>
+            </a:r>
+            <a:r>
+              <a:rPr lang="en-GB" sz="1000" dirty="0" err="1"/>
+              <a:t>PICtail</a:t>
+            </a:r>
+            <a:r>
+              <a:rPr lang="en-GB" sz="1000" dirty="0"/>
+              <a:t>™ daughter card connectivity or user access to</a:t>
+            </a:r>
+          </a:p>
+          <a:p>
+            <a:r>
+              <a:rPr lang="en-GB" sz="1000" dirty="0"/>
+              <a:t>MCU pins</a:t>
+            </a:r>
+          </a:p>
+          <a:p>
+            <a:r>
+              <a:rPr lang="en-GB" sz="1000" dirty="0"/>
+              <a:t>16. Microchip TC74 thermal sensor</a:t>
+            </a:r>
+          </a:p>
+        </p:txBody>
+      </p:sp>
     </p:spTree>
     <p:extLst>
       <p:ext uri="{BB962C8B-B14F-4D97-AF65-F5344CB8AC3E}">
@@ -10964,7 +11863,7 @@
   <a:extraClrSchemeLst/>
   <a:extLst>
     <a:ext uri="{05A4C25C-085E-4340-85A3-A5531E510DB2}">
-      <thm15:themeFamily xmlns:thm15="http://schemas.microsoft.com/office/thememl/2012/main" xmlns="" name="GCstudioThemeLight" id="{4C740F94-33C0-4EEC-9234-F56C348A0987}" vid="{A43F8B96-90D8-489D-B80F-92F9D6F351CC}"/>
+      <thm15:themeFamily xmlns="" xmlns:thm15="http://schemas.microsoft.com/office/thememl/2012/main" name="GCstudioThemeLight" id="{4C740F94-33C0-4EEC-9234-F56C348A0987}" vid="{A43F8B96-90D8-489D-B80F-92F9D6F351CC}"/>
     </a:ext>
   </a:extLst>
 </a:theme>
